--- a/Topic_C/Exam_Practice/TC-L04_Speaking_Workshop_Environmental_Problems_Causes.pptx
+++ b/Topic_C/Exam_Practice/TC-L04_Speaking_Workshop_Environmental_Problems_Causes.pptx
@@ -707,7 +707,11 @@
           <a:lstStyle/>
           <a:p>
             <a:r>
-              <a:rPr lang="en-US" dirty="0"/>
+              <a:rPr lang="ar-SA" dirty="0">
+                <a:latin typeface="Amiri" pitchFamily="2" charset="-78"/>
+                <a:ea typeface="Amiri" pitchFamily="2" charset="-78"/>
+                <a:cs typeface="Amiri" pitchFamily="2" charset="-78"/>
+              </a:rPr>
               <a:t>ROLE PLAY D (Stretch) — a youth debate.
 SET-UP IN THE BREAKOUT ROOM: A = examiner (reads the left column ONLY — the questions, in order), B = candidate (sees the task column; Core may use the help column), C = observer (ticks the feedback checklist). 1 minute preparation, about 3 minutes speaking, 1 minute feedback, then rotate.
 Task ! is the unexpected question: in the exam the candidate has not seen it — the examiner should read it without warning.
@@ -1243,7 +1247,11 @@
           <a:lstStyle/>
           <a:p>
             <a:r>
-              <a:rPr lang="en-US" dirty="0"/>
+              <a:rPr lang="ar-SA" dirty="0">
+                <a:latin typeface="Amiri" pitchFamily="2" charset="-78"/>
+                <a:ea typeface="Amiri" pitchFamily="2" charset="-78"/>
+                <a:cs typeface="Amiri" pitchFamily="2" charset="-78"/>
+              </a:rPr>
               <a:t>TOPIC CONVERSATION — Core. Examiner asks the questions in order and may add “لِمَاذَا؟ / هَلْ يُمْكِنُ أَنْ تَشْرَحَ أَكْثَرَ؟” to push for more. Candidate aims for one full sentence per question.
 </a:t>
             </a:r>
@@ -1332,7 +1340,11 @@
           <a:lstStyle/>
           <a:p>
             <a:r>
-              <a:rPr lang="en-US" dirty="0"/>
+              <a:rPr lang="ar-SA" dirty="0">
+                <a:latin typeface="Amiri" pitchFamily="2" charset="-78"/>
+                <a:ea typeface="Amiri" pitchFamily="2" charset="-78"/>
+                <a:cs typeface="Amiri" pitchFamily="2" charset="-78"/>
+              </a:rPr>
               <a:t>TOPIC CONVERSATION — Develop. Examiner asks the questions in order and may add “لِمَاذَا؟ / هَلْ يُمْكِنُ أَنْ تَشْرَحَ أَكْثَرَ؟” to push for more. Candidate aims for two or three sentences, with a cause, an effect and a past detail.
 </a:t>
             </a:r>
@@ -1421,7 +1433,11 @@
           <a:lstStyle/>
           <a:p>
             <a:r>
-              <a:rPr lang="en-US" dirty="0"/>
+              <a:rPr lang="ar-SA" dirty="0">
+                <a:latin typeface="Amiri" pitchFamily="2" charset="-78"/>
+                <a:ea typeface="Amiri" pitchFamily="2" charset="-78"/>
+                <a:cs typeface="Amiri" pitchFamily="2" charset="-78"/>
+              </a:rPr>
               <a:t>TOPIC CONVERSATION — Stretch. Examiner asks the questions in order and may add “لِمَاذَا؟ / هَلْ يُمْكِنُ أَنْ تَشْرَحَ أَكْثَرَ؟” to push for more. Candidate aims for a developed answer: opinion, balance, concession and a conditional.
 </a:t>
             </a:r>
@@ -1510,7 +1526,11 @@
           <a:lstStyle/>
           <a:p>
             <a:r>
-              <a:rPr lang="en-US" dirty="0"/>
+              <a:rPr lang="ar-SA" dirty="0">
+                <a:latin typeface="Amiri" pitchFamily="2" charset="-78"/>
+                <a:ea typeface="Amiri" pitchFamily="2" charset="-78"/>
+                <a:cs typeface="Amiri" pitchFamily="2" charset="-78"/>
+              </a:rPr>
               <a:t>WELCOME (1 min) — while students join.
 • Greet each student by name as they arrive: السَّلَامُ عَلَيْكُمْ. Take the register (Pastoral Tracker: attendance 0/1).
 • 2-MINUTE CHECK-IN (SEND training): a private chat to any student who seemed unsettled last lesson — “Are you okay today? 👍 / 👎”.
@@ -2224,7 +2244,11 @@
           <a:lstStyle/>
           <a:p>
             <a:r>
-              <a:rPr lang="en-US" dirty="0"/>
+              <a:rPr lang="ar-SA" dirty="0">
+                <a:latin typeface="Amiri" pitchFamily="2" charset="-78"/>
+                <a:ea typeface="Amiri" pitchFamily="2" charset="-78"/>
+                <a:cs typeface="Amiri" pitchFamily="2" charset="-78"/>
+              </a:rPr>
               <a:t>TEACH (3 min). Role play = precise and complete; conversation = develop. Choral repetition of the repair phrases. To a girl: تُعِيدِي.</a:t>
             </a:r>
             <a:endParaRPr lang="en-US" dirty="0"/>
@@ -2312,7 +2336,11 @@
           <a:lstStyle/>
           <a:p>
             <a:r>
-              <a:rPr lang="en-US" dirty="0"/>
+              <a:rPr lang="ar-SA" dirty="0">
+                <a:latin typeface="Amiri" pitchFamily="2" charset="-78"/>
+                <a:ea typeface="Amiri" pitchFamily="2" charset="-78"/>
+                <a:cs typeface="Amiri" pitchFamily="2" charset="-78"/>
+              </a:rPr>
               <a:t>LANGUAGE BANK (2 min) — active: المَصَانِعُ تُلَوِّثُ النَّهْرَ (factories pollute the river). Passive: يُلَوَّثُ النَّهْرُ (the river is polluted). Adjective: نَهْرٌ مُلَوَّثٌ · مَدِينَةٌ مُلَوَّثَةٌ.</a:t>
             </a:r>
             <a:endParaRPr lang="en-US" dirty="0"/>
@@ -2400,7 +2428,11 @@
           <a:lstStyle/>
           <a:p>
             <a:r>
-              <a:rPr lang="en-US" dirty="0"/>
+              <a:rPr lang="ar-SA" dirty="0">
+                <a:latin typeface="Amiri" pitchFamily="2" charset="-78"/>
+                <a:ea typeface="Amiri" pitchFamily="2" charset="-78"/>
+                <a:cs typeface="Amiri" pitchFamily="2" charset="-78"/>
+              </a:rPr>
               <a:t>LANGUAGE BANK (2 min) — بِسَبَبِ + noun in genitive: بِسَبَبِ الدُّخَانِ. لِأَنَّ + sentence. يُؤَدِّي إِلَى + noun. مِمَّا يُسَبِّبُ links a whole idea to its result.</a:t>
             </a:r>
             <a:endParaRPr lang="en-US" dirty="0"/>
@@ -2576,7 +2608,11 @@
           <a:lstStyle/>
           <a:p>
             <a:r>
-              <a:rPr lang="en-US" dirty="0"/>
+              <a:rPr lang="ar-SA" dirty="0">
+                <a:latin typeface="Amiri" pitchFamily="2" charset="-78"/>
+                <a:ea typeface="Amiri" pitchFamily="2" charset="-78"/>
+                <a:cs typeface="Amiri" pitchFamily="2" charset="-78"/>
+              </a:rPr>
               <a:t>ROLE PLAY A (Core) — a school survey.
 SET-UP IN THE BREAKOUT ROOM: A = examiner (reads the left column ONLY — the questions, in order), B = candidate (sees the task column; Core may use the help column), C = observer (ticks the feedback checklist). 1 minute preparation, about 3 minutes speaking, 1 minute feedback, then rotate.
 Task ! is the unexpected question: in the exam the candidate has not seen it — the examiner should read it without warning.
@@ -2668,7 +2704,11 @@
           <a:lstStyle/>
           <a:p>
             <a:r>
-              <a:rPr lang="en-US" dirty="0"/>
+              <a:rPr lang="ar-SA" dirty="0">
+                <a:latin typeface="Amiri" pitchFamily="2" charset="-78"/>
+                <a:ea typeface="Amiri" pitchFamily="2" charset="-78"/>
+                <a:cs typeface="Amiri" pitchFamily="2" charset="-78"/>
+              </a:rPr>
               <a:t>ROLE PLAY B (Core+) — a polluted beach.
 SET-UP IN THE BREAKOUT ROOM: A = examiner (reads the left column ONLY — the questions, in order), B = candidate (sees the task column; Core may use the help column), C = observer (ticks the feedback checklist). 1 minute preparation, about 3 minutes speaking, 1 minute feedback, then rotate.
 Task ! is the unexpected question: in the exam the candidate has not seen it — the examiner should read it without warning.
@@ -3156,6 +3196,7 @@
                   <a:srgbClr val="D4AF37"/>
                 </a:solidFill>
                 <a:latin typeface="Amiri" pitchFamily="2" charset="-78"/>
+                <a:ea typeface="Amiri" pitchFamily="2" charset="-78"/>
                 <a:cs typeface="Amiri" pitchFamily="2" charset="-78"/>
               </a:rPr>
               <a:t>م</a:t>
@@ -3362,6 +3403,7 @@
                   <a:srgbClr val="D4AF37"/>
                 </a:solidFill>
                 <a:latin typeface="Amiri" pitchFamily="2" charset="-78"/>
+                <a:ea typeface="Amiri" pitchFamily="2" charset="-78"/>
                 <a:cs typeface="Amiri" pitchFamily="2" charset="-78"/>
               </a:rPr>
               <a:t>وَرْشَةُ التَّحَدُّثِ — مَشَاكِلُ البِيئَةِ</a:t>
@@ -3413,6 +3455,7 @@
                   <a:srgbClr val="C6D2E6"/>
                 </a:solidFill>
                 <a:latin typeface="Amiri" pitchFamily="2" charset="-78"/>
+                <a:ea typeface="Amiri" pitchFamily="2" charset="-78"/>
                 <a:cs typeface="Amiri" pitchFamily="2" charset="-78"/>
               </a:rPr>
               <a:t>بِسَبَبِ</a:t>
@@ -3439,6 +3482,7 @@
                   <a:srgbClr val="C6D2E6"/>
                 </a:solidFill>
                 <a:latin typeface="Amiri" pitchFamily="2" charset="-78"/>
+                <a:ea typeface="Amiri" pitchFamily="2" charset="-78"/>
                 <a:cs typeface="Amiri" pitchFamily="2" charset="-78"/>
               </a:rPr>
               <a:t>يُؤَدِّي إِلَى</a:t>
@@ -3465,6 +3509,7 @@
                   <a:srgbClr val="C6D2E6"/>
                 </a:solidFill>
                 <a:latin typeface="Amiri" pitchFamily="2" charset="-78"/>
+                <a:ea typeface="Amiri" pitchFamily="2" charset="-78"/>
                 <a:cs typeface="Amiri" pitchFamily="2" charset="-78"/>
               </a:rPr>
               <a:t>مِمَّا يُسَبِّبُ</a:t>
@@ -3897,6 +3942,7 @@
                   <a:srgbClr val="D4AF37"/>
                 </a:solidFill>
                 <a:latin typeface="Amiri" pitchFamily="2" charset="-78"/>
+                <a:ea typeface="Amiri" pitchFamily="2" charset="-78"/>
                 <a:cs typeface="Amiri" pitchFamily="2" charset="-78"/>
               </a:rPr>
               <a:t>م</a:t>
@@ -4217,6 +4263,7 @@
                   <a:srgbClr val="8A6D1E"/>
                 </a:solidFill>
                 <a:latin typeface="Amiri" pitchFamily="2" charset="-78"/>
+                <a:ea typeface="Amiri" pitchFamily="2" charset="-78"/>
                 <a:cs typeface="Amiri" pitchFamily="2" charset="-78"/>
               </a:rPr>
               <a:t>النَّهْرُ يَمُوتُ</a:t>
@@ -4497,6 +4544,7 @@
                   <a:srgbClr val="1B3B6F"/>
                 </a:solidFill>
                 <a:latin typeface="Amiri" pitchFamily="2" charset="-78"/>
+                <a:ea typeface="Amiri" pitchFamily="2" charset="-78"/>
                 <a:cs typeface="Amiri" pitchFamily="2" charset="-78"/>
               </a:rPr>
               <a:t>تَلَوَّثَ … وَمَاتَتْ …</a:t>
@@ -4573,6 +4621,7 @@
                   <a:srgbClr val="1B3B6F"/>
                 </a:solidFill>
                 <a:latin typeface="Amiri" pitchFamily="2" charset="-78"/>
+                <a:ea typeface="Amiri" pitchFamily="2" charset="-78"/>
                 <a:cs typeface="Amiri" pitchFamily="2" charset="-78"/>
               </a:rPr>
               <a:t>مَاذَا حَدَثَ لِلنَّهْرِ؟</a:t>
@@ -4676,6 +4725,7 @@
                   <a:srgbClr val="1B3B6F"/>
                 </a:solidFill>
                 <a:latin typeface="Amiri" pitchFamily="2" charset="-78"/>
+                <a:ea typeface="Amiri" pitchFamily="2" charset="-78"/>
                 <a:cs typeface="Amiri" pitchFamily="2" charset="-78"/>
               </a:rPr>
               <a:t>المَصْنَعُ … / تُرْمَى …</a:t>
@@ -4752,6 +4802,7 @@
                   <a:srgbClr val="1B3B6F"/>
                 </a:solidFill>
                 <a:latin typeface="Amiri" pitchFamily="2" charset="-78"/>
+                <a:ea typeface="Amiri" pitchFamily="2" charset="-78"/>
                 <a:cs typeface="Amiri" pitchFamily="2" charset="-78"/>
               </a:rPr>
               <a:t>مَا السَّبَبُ؟</a:t>
@@ -4855,6 +4906,7 @@
                   <a:srgbClr val="1B3B6F"/>
                 </a:solidFill>
                 <a:latin typeface="Amiri" pitchFamily="2" charset="-78"/>
+                <a:ea typeface="Amiri" pitchFamily="2" charset="-78"/>
                 <a:cs typeface="Amiri" pitchFamily="2" charset="-78"/>
               </a:rPr>
               <a:t>كَانَ … وَكُنَّا …</a:t>
@@ -4931,6 +4983,7 @@
                   <a:srgbClr val="1B3B6F"/>
                 </a:solidFill>
                 <a:latin typeface="Amiri" pitchFamily="2" charset="-78"/>
+                <a:ea typeface="Amiri" pitchFamily="2" charset="-78"/>
                 <a:cs typeface="Amiri" pitchFamily="2" charset="-78"/>
               </a:rPr>
               <a:t>كَيْفَ كَانَ النَّهْرُ قَبْلَ ذٰلِكَ؟</a:t>
@@ -5034,6 +5087,7 @@
                   <a:srgbClr val="1B3B6F"/>
                 </a:solidFill>
                 <a:latin typeface="Amiri" pitchFamily="2" charset="-78"/>
+                <a:ea typeface="Amiri" pitchFamily="2" charset="-78"/>
                 <a:cs typeface="Amiri" pitchFamily="2" charset="-78"/>
               </a:rPr>
               <a:t>يُؤَدِّي إِلَى … وَ…</a:t>
@@ -5110,6 +5164,7 @@
                   <a:srgbClr val="1B3B6F"/>
                 </a:solidFill>
                 <a:latin typeface="Amiri" pitchFamily="2" charset="-78"/>
+                <a:ea typeface="Amiri" pitchFamily="2" charset="-78"/>
                 <a:cs typeface="Amiri" pitchFamily="2" charset="-78"/>
               </a:rPr>
               <a:t>وَمَا النَّتَائِجُ عَلَى السُّكَّانِ؟</a:t>
@@ -5213,6 +5268,7 @@
                   <a:srgbClr val="1B3B6F"/>
                 </a:solidFill>
                 <a:latin typeface="Amiri" pitchFamily="2" charset="-78"/>
+                <a:ea typeface="Amiri" pitchFamily="2" charset="-78"/>
                 <a:cs typeface="Amiri" pitchFamily="2" charset="-78"/>
               </a:rPr>
               <a:t>سَنَكْتُبُ … وَسَنَجْمَعُ …</a:t>
@@ -5289,6 +5345,7 @@
                   <a:srgbClr val="1B3B6F"/>
                 </a:solidFill>
                 <a:latin typeface="Amiri" pitchFamily="2" charset="-78"/>
+                <a:ea typeface="Amiri" pitchFamily="2" charset="-78"/>
                 <a:cs typeface="Amiri" pitchFamily="2" charset="-78"/>
               </a:rPr>
               <a:t>مَاذَا سَتَفْعَلُونَ الآنَ؟</a:t>
@@ -5498,6 +5555,7 @@
                   <a:srgbClr val="D4AF37"/>
                 </a:solidFill>
                 <a:latin typeface="Amiri" pitchFamily="2" charset="-78"/>
+                <a:ea typeface="Amiri" pitchFamily="2" charset="-78"/>
                 <a:cs typeface="Amiri" pitchFamily="2" charset="-78"/>
               </a:rPr>
               <a:t>م</a:t>
@@ -5818,6 +5876,7 @@
                   <a:srgbClr val="8A6D1E"/>
                 </a:solidFill>
                 <a:latin typeface="Amiri" pitchFamily="2" charset="-78"/>
+                <a:ea typeface="Amiri" pitchFamily="2" charset="-78"/>
                 <a:cs typeface="Amiri" pitchFamily="2" charset="-78"/>
               </a:rPr>
               <a:t>مَنِ المَسْؤُولُ؟</a:t>
@@ -6098,6 +6157,7 @@
                   <a:srgbClr val="1B3B6F"/>
                 </a:solidFill>
                 <a:latin typeface="Amiri" pitchFamily="2" charset="-78"/>
+                <a:ea typeface="Amiri" pitchFamily="2" charset="-78"/>
                 <a:cs typeface="Amiri" pitchFamily="2" charset="-78"/>
               </a:rPr>
               <a:t>أَخْطَرُهَا … بِدَلِيلِ أَنَّ …</a:t>
@@ -6174,6 +6234,7 @@
                   <a:srgbClr val="1B3B6F"/>
                 </a:solidFill>
                 <a:latin typeface="Amiri" pitchFamily="2" charset="-78"/>
+                <a:ea typeface="Amiri" pitchFamily="2" charset="-78"/>
                 <a:cs typeface="Amiri" pitchFamily="2" charset="-78"/>
               </a:rPr>
               <a:t>مَا أَخْطَرُ مُشْكِلَةٍ بِيئِيَّةٍ فِي رَأْيِكَ؟</a:t>
@@ -6277,6 +6338,7 @@
                   <a:srgbClr val="1B3B6F"/>
                 </a:solidFill>
                 <a:latin typeface="Amiri" pitchFamily="2" charset="-78"/>
+                <a:ea typeface="Amiri" pitchFamily="2" charset="-78"/>
                 <a:cs typeface="Amiri" pitchFamily="2" charset="-78"/>
               </a:rPr>
               <a:t>يَزْدَادُ … مِمَّا يُؤَدِّي إِلَى …</a:t>
@@ -6353,6 +6415,7 @@
                   <a:srgbClr val="1B3B6F"/>
                 </a:solidFill>
                 <a:latin typeface="Amiri" pitchFamily="2" charset="-78"/>
+                <a:ea typeface="Amiri" pitchFamily="2" charset="-78"/>
                 <a:cs typeface="Amiri" pitchFamily="2" charset="-78"/>
               </a:rPr>
               <a:t>وَمَا أَسْبَابُهُ؟</a:t>
@@ -6456,6 +6519,7 @@
                   <a:srgbClr val="1B3B6F"/>
                 </a:solidFill>
                 <a:latin typeface="Amiri" pitchFamily="2" charset="-78"/>
+                <a:ea typeface="Amiri" pitchFamily="2" charset="-78"/>
                 <a:cs typeface="Amiri" pitchFamily="2" charset="-78"/>
               </a:rPr>
               <a:t>مِنْ نَاحِيَةٍ … وَمِنْ نَاحِيَةٍ أُخْرَى …</a:t>
@@ -6532,6 +6596,7 @@
                   <a:srgbClr val="1B3B6F"/>
                 </a:solidFill>
                 <a:latin typeface="Amiri" pitchFamily="2" charset="-78"/>
+                <a:ea typeface="Amiri" pitchFamily="2" charset="-78"/>
                 <a:cs typeface="Amiri" pitchFamily="2" charset="-78"/>
               </a:rPr>
               <a:t>هَلِ المَسْؤُولُ الحُكُومَاتُ أَمِ الأَفْرَادُ؟</a:t>
@@ -6635,6 +6700,7 @@
                   <a:srgbClr val="1B3B6F"/>
                 </a:solidFill>
                 <a:latin typeface="Amiri" pitchFamily="2" charset="-78"/>
+                <a:ea typeface="Amiri" pitchFamily="2" charset="-78"/>
                 <a:cs typeface="Amiri" pitchFamily="2" charset="-78"/>
               </a:rPr>
               <a:t>صَحِيحٌ أَنَّ … غَيْرَ أَنَّ …</a:t>
@@ -6711,6 +6777,7 @@
                   <a:srgbClr val="1B3B6F"/>
                 </a:solidFill>
                 <a:latin typeface="Amiri" pitchFamily="2" charset="-78"/>
+                <a:ea typeface="Amiri" pitchFamily="2" charset="-78"/>
                 <a:cs typeface="Amiri" pitchFamily="2" charset="-78"/>
               </a:rPr>
               <a:t>لٰكِنَّ المَصَانِعَ تُوَفِّرُ الوَظَائِفَ!</a:t>
@@ -6814,6 +6881,7 @@
                   <a:srgbClr val="1B3B6F"/>
                 </a:solidFill>
                 <a:latin typeface="Amiri" pitchFamily="2" charset="-78"/>
+                <a:ea typeface="Amiri" pitchFamily="2" charset="-78"/>
                 <a:cs typeface="Amiri" pitchFamily="2" charset="-78"/>
               </a:rPr>
               <a:t>لَوْ لَمْ تُوجَدْ …، لَكَانَتِ …</a:t>
@@ -6890,6 +6958,7 @@
                   <a:srgbClr val="1B3B6F"/>
                 </a:solidFill>
                 <a:latin typeface="Amiri" pitchFamily="2" charset="-78"/>
+                <a:ea typeface="Amiri" pitchFamily="2" charset="-78"/>
                 <a:cs typeface="Amiri" pitchFamily="2" charset="-78"/>
               </a:rPr>
               <a:t>لَوْ لَمْ تُوجَدْ سَيَّارَاتٌ، كَيْفَ تَكُونُ المُدُنُ؟</a:t>
@@ -7099,6 +7168,7 @@
                   <a:srgbClr val="D4AF37"/>
                 </a:solidFill>
                 <a:latin typeface="Amiri" pitchFamily="2" charset="-78"/>
+                <a:ea typeface="Amiri" pitchFamily="2" charset="-78"/>
                 <a:cs typeface="Amiri" pitchFamily="2" charset="-78"/>
               </a:rPr>
               <a:t>م</a:t>
@@ -7419,6 +7489,7 @@
                   <a:srgbClr val="8A6D1E"/>
                 </a:solidFill>
                 <a:latin typeface="Amiri" pitchFamily="2" charset="-78"/>
+                <a:ea typeface="Amiri" pitchFamily="2" charset="-78"/>
                 <a:cs typeface="Amiri" pitchFamily="2" charset="-78"/>
               </a:rPr>
               <a:t>وَرَقَةُ المُلَاحِظِ</a:t>
@@ -8889,6 +8960,7 @@
                   <a:srgbClr val="D4AF37"/>
                 </a:solidFill>
                 <a:latin typeface="Amiri" pitchFamily="2" charset="-78"/>
+                <a:ea typeface="Amiri" pitchFamily="2" charset="-78"/>
                 <a:cs typeface="Amiri" pitchFamily="2" charset="-78"/>
               </a:rPr>
               <a:t>م</a:t>
@@ -9209,6 +9281,7 @@
                   <a:srgbClr val="8A6D1E"/>
                 </a:solidFill>
                 <a:latin typeface="Amiri" pitchFamily="2" charset="-78"/>
+                <a:ea typeface="Amiri" pitchFamily="2" charset="-78"/>
                 <a:cs typeface="Amiri" pitchFamily="2" charset="-78"/>
               </a:rPr>
               <a:t>نَمُوذَجُ الإِجَابَةِ</a:t>
@@ -9451,6 +9524,7 @@
                   <a:srgbClr val="1B3B6F"/>
                 </a:solidFill>
                 <a:latin typeface="Amiri" pitchFamily="2" charset="-78"/>
+                <a:ea typeface="Amiri" pitchFamily="2" charset="-78"/>
                 <a:cs typeface="Amiri" pitchFamily="2" charset="-78"/>
               </a:rPr>
               <a:t>أَكْبَرُ مُشْكِلَةٍ هِيَ زَحْمَةُ المُرُورِ.</a:t>
@@ -9527,6 +9601,7 @@
                   <a:srgbClr val="1B3B6F"/>
                 </a:solidFill>
                 <a:latin typeface="Amiri" pitchFamily="2" charset="-78"/>
+                <a:ea typeface="Amiri" pitchFamily="2" charset="-78"/>
                 <a:cs typeface="Amiri" pitchFamily="2" charset="-78"/>
               </a:rPr>
               <a:t>مَا أَكْبَرُ مُشْكِلَةٍ فِي مَدِينَتِكَ؟</a:t>
@@ -9630,6 +9705,7 @@
                   <a:srgbClr val="1B3B6F"/>
                 </a:solidFill>
                 <a:latin typeface="Amiri" pitchFamily="2" charset="-78"/>
+                <a:ea typeface="Amiri" pitchFamily="2" charset="-78"/>
                 <a:cs typeface="Amiri" pitchFamily="2" charset="-78"/>
               </a:rPr>
               <a:t>لِأَنَّ السَّيَّارَاتِ تُلَوِّثُ الهَوَاءَ.</a:t>
@@ -9706,6 +9782,7 @@
                   <a:srgbClr val="1B3B6F"/>
                 </a:solidFill>
                 <a:latin typeface="Amiri" pitchFamily="2" charset="-78"/>
+                <a:ea typeface="Amiri" pitchFamily="2" charset="-78"/>
                 <a:cs typeface="Amiri" pitchFamily="2" charset="-78"/>
               </a:rPr>
               <a:t>لِمَاذَا هِيَ مُشْكِلَةٌ؟</a:t>
@@ -9809,6 +9886,7 @@
                   <a:srgbClr val="1B3B6F"/>
                 </a:solidFill>
                 <a:latin typeface="Amiri" pitchFamily="2" charset="-78"/>
+                <a:ea typeface="Amiri" pitchFamily="2" charset="-78"/>
                 <a:cs typeface="Amiri" pitchFamily="2" charset="-78"/>
               </a:rPr>
               <a:t>فِي المَدْرَسَةِ النُّفَايَاتُ البْلَاسْتِيكِيَّةُ كَثِيرَةٌ.</a:t>
@@ -9885,6 +9963,7 @@
                   <a:srgbClr val="1B3B6F"/>
                 </a:solidFill>
                 <a:latin typeface="Amiri" pitchFamily="2" charset="-78"/>
+                <a:ea typeface="Amiri" pitchFamily="2" charset="-78"/>
                 <a:cs typeface="Amiri" pitchFamily="2" charset="-78"/>
               </a:rPr>
               <a:t>وَفِي المَدْرَسَةِ؟</a:t>
@@ -9988,6 +10067,7 @@
                   <a:srgbClr val="1B3B6F"/>
                 </a:solidFill>
                 <a:latin typeface="Amiri" pitchFamily="2" charset="-78"/>
+                <a:ea typeface="Amiri" pitchFamily="2" charset="-78"/>
                 <a:cs typeface="Amiri" pitchFamily="2" charset="-78"/>
               </a:rPr>
               <a:t>مَنْ سَيَقْرَأُ التَّقْرِيرَ؟</a:t>
@@ -10064,6 +10144,7 @@
                   <a:srgbClr val="1B3B6F"/>
                 </a:solidFill>
                 <a:latin typeface="Amiri" pitchFamily="2" charset="-78"/>
+                <a:ea typeface="Amiri" pitchFamily="2" charset="-78"/>
                 <a:cs typeface="Amiri" pitchFamily="2" charset="-78"/>
               </a:rPr>
               <a:t>نُرِيدُ أَنْ نَكْتُبَ تَقْرِيرًا.</a:t>
@@ -10167,6 +10248,7 @@
                   <a:srgbClr val="1B3B6F"/>
                 </a:solidFill>
                 <a:latin typeface="Amiri" pitchFamily="2" charset="-78"/>
+                <a:ea typeface="Amiri" pitchFamily="2" charset="-78"/>
                 <a:cs typeface="Amiri" pitchFamily="2" charset="-78"/>
               </a:rPr>
               <a:t>آتِي إِلَى المَدْرَسَةِ مَشْيًا، لِأَنَّ بَيْتِي قَرِيبٌ.</a:t>
@@ -10243,6 +10325,7 @@
                   <a:srgbClr val="1B3B6F"/>
                 </a:solidFill>
                 <a:latin typeface="Amiri" pitchFamily="2" charset="-78"/>
+                <a:ea typeface="Amiri" pitchFamily="2" charset="-78"/>
                 <a:cs typeface="Amiri" pitchFamily="2" charset="-78"/>
               </a:rPr>
               <a:t>كَيْفَ تَأْتِي إِلَى المَدْرَسَةِ؟</a:t>
@@ -10452,6 +10535,7 @@
                   <a:srgbClr val="D4AF37"/>
                 </a:solidFill>
                 <a:latin typeface="Amiri" pitchFamily="2" charset="-78"/>
+                <a:ea typeface="Amiri" pitchFamily="2" charset="-78"/>
                 <a:cs typeface="Amiri" pitchFamily="2" charset="-78"/>
               </a:rPr>
               <a:t>م</a:t>
@@ -10772,6 +10856,7 @@
                   <a:srgbClr val="8A6D1E"/>
                 </a:solidFill>
                 <a:latin typeface="Amiri" pitchFamily="2" charset="-78"/>
+                <a:ea typeface="Amiri" pitchFamily="2" charset="-78"/>
                 <a:cs typeface="Amiri" pitchFamily="2" charset="-78"/>
               </a:rPr>
               <a:t>نَمُوذَجُ الإِجَابَةِ</a:t>
@@ -11014,6 +11099,7 @@
                   <a:srgbClr val="1B3B6F"/>
                 </a:solidFill>
                 <a:latin typeface="Amiri" pitchFamily="2" charset="-78"/>
+                <a:ea typeface="Amiri" pitchFamily="2" charset="-78"/>
                 <a:cs typeface="Amiri" pitchFamily="2" charset="-78"/>
               </a:rPr>
               <a:t>أَنَا عَلَى الشَّاطِئِ الشَّمَالِيِّ، وَهُوَ مُلَوَّثٌ جِدًّا.</a:t>
@@ -11090,6 +11176,7 @@
                   <a:srgbClr val="1B3B6F"/>
                 </a:solidFill>
                 <a:latin typeface="Amiri" pitchFamily="2" charset="-78"/>
+                <a:ea typeface="Amiri" pitchFamily="2" charset="-78"/>
                 <a:cs typeface="Amiri" pitchFamily="2" charset="-78"/>
               </a:rPr>
               <a:t>أَهْلًا، كَيْفَ أُسَاعِدُكَ؟</a:t>
@@ -11193,6 +11280,7 @@
                   <a:srgbClr val="1B3B6F"/>
                 </a:solidFill>
                 <a:latin typeface="Amiri" pitchFamily="2" charset="-78"/>
+                <a:ea typeface="Amiri" pitchFamily="2" charset="-78"/>
                 <a:cs typeface="Amiri" pitchFamily="2" charset="-78"/>
               </a:rPr>
               <a:t>أَرَى زُجَاجَاتٍ بْلَاسْتِيكِيَّةً كَثِيرَةً، وَأَكْيَاسًا عَلَى الرَّمْلِ.</a:t>
@@ -11269,6 +11357,7 @@
                   <a:srgbClr val="1B3B6F"/>
                 </a:solidFill>
                 <a:latin typeface="Amiri" pitchFamily="2" charset="-78"/>
+                <a:ea typeface="Amiri" pitchFamily="2" charset="-78"/>
                 <a:cs typeface="Amiri" pitchFamily="2" charset="-78"/>
               </a:rPr>
               <a:t>مَاذَا تَرَى بِالضَّبْطِ؟</a:t>
@@ -11372,6 +11461,7 @@
                   <a:srgbClr val="1B3B6F"/>
                 </a:solidFill>
                 <a:latin typeface="Amiri" pitchFamily="2" charset="-78"/>
+                <a:ea typeface="Amiri" pitchFamily="2" charset="-78"/>
                 <a:cs typeface="Amiri" pitchFamily="2" charset="-78"/>
               </a:rPr>
               <a:t>مَتَى سَيُنَظَّفُ الشَّاطِئُ؟</a:t>
@@ -11448,6 +11538,7 @@
                   <a:srgbClr val="1B3B6F"/>
                 </a:solidFill>
                 <a:latin typeface="Amiri" pitchFamily="2" charset="-78"/>
+                <a:ea typeface="Amiri" pitchFamily="2" charset="-78"/>
                 <a:cs typeface="Amiri" pitchFamily="2" charset="-78"/>
               </a:rPr>
               <a:t>هٰذَا غَرِيبٌ.</a:t>
@@ -11551,6 +11642,7 @@
                   <a:srgbClr val="1B3B6F"/>
                 </a:solidFill>
                 <a:latin typeface="Amiri" pitchFamily="2" charset="-78"/>
+                <a:ea typeface="Amiri" pitchFamily="2" charset="-78"/>
                 <a:cs typeface="Amiri" pitchFamily="2" charset="-78"/>
               </a:rPr>
               <a:t>بِسَبَبِ الزُّوَّارِ الَّذِينَ يَتْرُكُونَ نُفَايَاتِهِمْ، مِمَّا يَضُرُّ بِالطُّيُورِ وَالأَسْمَاكِ.</a:t>
@@ -11627,6 +11719,7 @@
                   <a:srgbClr val="1B3B6F"/>
                 </a:solidFill>
                 <a:latin typeface="Amiri" pitchFamily="2" charset="-78"/>
+                <a:ea typeface="Amiri" pitchFamily="2" charset="-78"/>
                 <a:cs typeface="Amiri" pitchFamily="2" charset="-78"/>
               </a:rPr>
               <a:t>غَدًا إِنْ شَاءَ اللّٰهُ. مَا السَّبَبُ فِي رَأْيِكَ؟</a:t>
@@ -11730,6 +11823,7 @@
                   <a:srgbClr val="1B3B6F"/>
                 </a:solidFill>
                 <a:latin typeface="Amiri" pitchFamily="2" charset="-78"/>
+                <a:ea typeface="Amiri" pitchFamily="2" charset="-78"/>
                 <a:cs typeface="Amiri" pitchFamily="2" charset="-78"/>
               </a:rPr>
               <a:t>نَعَمْ، لٰكِنَّهَا قَلِيلَةٌ وَمُمْتَلِئَةٌ.</a:t>
@@ -11806,6 +11900,7 @@
                   <a:srgbClr val="1B3B6F"/>
                 </a:solidFill>
                 <a:latin typeface="Amiri" pitchFamily="2" charset="-78"/>
+                <a:ea typeface="Amiri" pitchFamily="2" charset="-78"/>
                 <a:cs typeface="Amiri" pitchFamily="2" charset="-78"/>
               </a:rPr>
               <a:t>هَلْ تَرَى سَلَّاتِ مُهْمَلَاتٍ هُنَاكَ؟</a:t>
@@ -12015,6 +12110,7 @@
                   <a:srgbClr val="D4AF37"/>
                 </a:solidFill>
                 <a:latin typeface="Amiri" pitchFamily="2" charset="-78"/>
+                <a:ea typeface="Amiri" pitchFamily="2" charset="-78"/>
                 <a:cs typeface="Amiri" pitchFamily="2" charset="-78"/>
               </a:rPr>
               <a:t>م</a:t>
@@ -12335,6 +12431,7 @@
                   <a:srgbClr val="8A6D1E"/>
                 </a:solidFill>
                 <a:latin typeface="Amiri" pitchFamily="2" charset="-78"/>
+                <a:ea typeface="Amiri" pitchFamily="2" charset="-78"/>
                 <a:cs typeface="Amiri" pitchFamily="2" charset="-78"/>
               </a:rPr>
               <a:t>نَمُوذَجُ الإِجَابَةِ</a:t>
@@ -12577,6 +12674,7 @@
                   <a:srgbClr val="1B3B6F"/>
                 </a:solidFill>
                 <a:latin typeface="Amiri" pitchFamily="2" charset="-78"/>
+                <a:ea typeface="Amiri" pitchFamily="2" charset="-78"/>
                 <a:cs typeface="Amiri" pitchFamily="2" charset="-78"/>
               </a:rPr>
               <a:t>تَلَوَّثَ النَّهْرُ فِي الشَّهْرِ المَاضِي، وَمَاتَتْ أَسْمَاكٌ كَثِيرَةٌ.</a:t>
@@ -12653,6 +12751,7 @@
                   <a:srgbClr val="1B3B6F"/>
                 </a:solidFill>
                 <a:latin typeface="Amiri" pitchFamily="2" charset="-78"/>
+                <a:ea typeface="Amiri" pitchFamily="2" charset="-78"/>
                 <a:cs typeface="Amiri" pitchFamily="2" charset="-78"/>
               </a:rPr>
               <a:t>مَاذَا حَدَثَ لِلنَّهْرِ؟</a:t>
@@ -12756,6 +12855,7 @@
                   <a:srgbClr val="1B3B6F"/>
                 </a:solidFill>
                 <a:latin typeface="Amiri" pitchFamily="2" charset="-78"/>
+                <a:ea typeface="Amiri" pitchFamily="2" charset="-78"/>
                 <a:cs typeface="Amiri" pitchFamily="2" charset="-78"/>
               </a:rPr>
               <a:t>المَصْنَعُ القَرِيبُ يَرْمِي مَوَادَّ كِيمِيَائِيَّةً فِيهِ؛ أَيْ تُرْمَى المَوَادُّ فِي المَاءِ لَيْلًا.</a:t>
@@ -12832,6 +12932,7 @@
                   <a:srgbClr val="1B3B6F"/>
                 </a:solidFill>
                 <a:latin typeface="Amiri" pitchFamily="2" charset="-78"/>
+                <a:ea typeface="Amiri" pitchFamily="2" charset="-78"/>
                 <a:cs typeface="Amiri" pitchFamily="2" charset="-78"/>
               </a:rPr>
               <a:t>مَا السَّبَبُ؟</a:t>
@@ -12935,6 +13036,7 @@
                   <a:srgbClr val="1B3B6F"/>
                 </a:solidFill>
                 <a:latin typeface="Amiri" pitchFamily="2" charset="-78"/>
+                <a:ea typeface="Amiri" pitchFamily="2" charset="-78"/>
                 <a:cs typeface="Amiri" pitchFamily="2" charset="-78"/>
               </a:rPr>
               <a:t>كَانَ صَافِيًا وَنَظِيفًا، وَكُنَّا نَصْطَادُ فِيهِ مَعَ أَبِي.</a:t>
@@ -13011,6 +13113,7 @@
                   <a:srgbClr val="1B3B6F"/>
                 </a:solidFill>
                 <a:latin typeface="Amiri" pitchFamily="2" charset="-78"/>
+                <a:ea typeface="Amiri" pitchFamily="2" charset="-78"/>
                 <a:cs typeface="Amiri" pitchFamily="2" charset="-78"/>
               </a:rPr>
               <a:t>كَيْفَ كَانَ النَّهْرُ قَبْلَ ذٰلِكَ؟</a:t>
@@ -13114,6 +13217,7 @@
                   <a:srgbClr val="1B3B6F"/>
                 </a:solidFill>
                 <a:latin typeface="Amiri" pitchFamily="2" charset="-78"/>
+                <a:ea typeface="Amiri" pitchFamily="2" charset="-78"/>
                 <a:cs typeface="Amiri" pitchFamily="2" charset="-78"/>
               </a:rPr>
               <a:t>يُؤَدِّي التَّلَوُّثُ إِلَى رَائِحَةٍ كَرِيهَةٍ، وَإِلَى أَمْرَاضٍ عِنْدَ الأَطْفَالِ.</a:t>
@@ -13190,6 +13294,7 @@
                   <a:srgbClr val="1B3B6F"/>
                 </a:solidFill>
                 <a:latin typeface="Amiri" pitchFamily="2" charset="-78"/>
+                <a:ea typeface="Amiri" pitchFamily="2" charset="-78"/>
                 <a:cs typeface="Amiri" pitchFamily="2" charset="-78"/>
               </a:rPr>
               <a:t>وَمَا النَّتَائِجُ عَلَى السُّكَّانِ؟</a:t>
@@ -13293,6 +13398,7 @@
                   <a:srgbClr val="1B3B6F"/>
                 </a:solidFill>
                 <a:latin typeface="Amiri" pitchFamily="2" charset="-78"/>
+                <a:ea typeface="Amiri" pitchFamily="2" charset="-78"/>
                 <a:cs typeface="Amiri" pitchFamily="2" charset="-78"/>
               </a:rPr>
               <a:t>سَنَكْتُبُ رِسَالَةً إِلَى البَلَدِيَّةِ، وَسَنَجْمَعُ تَوْقِيعَاتِ الجِيرَانِ.</a:t>
@@ -13369,6 +13475,7 @@
                   <a:srgbClr val="1B3B6F"/>
                 </a:solidFill>
                 <a:latin typeface="Amiri" pitchFamily="2" charset="-78"/>
+                <a:ea typeface="Amiri" pitchFamily="2" charset="-78"/>
                 <a:cs typeface="Amiri" pitchFamily="2" charset="-78"/>
               </a:rPr>
               <a:t>مَاذَا سَتَفْعَلُونَ الآنَ؟</a:t>
@@ -13578,6 +13685,7 @@
                   <a:srgbClr val="D4AF37"/>
                 </a:solidFill>
                 <a:latin typeface="Amiri" pitchFamily="2" charset="-78"/>
+                <a:ea typeface="Amiri" pitchFamily="2" charset="-78"/>
                 <a:cs typeface="Amiri" pitchFamily="2" charset="-78"/>
               </a:rPr>
               <a:t>م</a:t>
@@ -13898,6 +14006,7 @@
                   <a:srgbClr val="8A6D1E"/>
                 </a:solidFill>
                 <a:latin typeface="Amiri" pitchFamily="2" charset="-78"/>
+                <a:ea typeface="Amiri" pitchFamily="2" charset="-78"/>
                 <a:cs typeface="Amiri" pitchFamily="2" charset="-78"/>
               </a:rPr>
               <a:t>نَمُوذَجُ الإِجَابَةِ</a:t>
@@ -14140,6 +14249,7 @@
                   <a:srgbClr val="1B3B6F"/>
                 </a:solidFill>
                 <a:latin typeface="Amiri" pitchFamily="2" charset="-78"/>
+                <a:ea typeface="Amiri" pitchFamily="2" charset="-78"/>
                 <a:cs typeface="Amiri" pitchFamily="2" charset="-78"/>
               </a:rPr>
               <a:t>أَخْطَرُهَا تَلَوُّثُ الهَوَاءِ، بِدَلِيلِ أَنَّ مَلَايِينَ النَّاسِ يَمُوتُونَ بِسَبَبِهِ كُلَّ سَنَةٍ.</a:t>
@@ -14216,6 +14326,7 @@
                   <a:srgbClr val="1B3B6F"/>
                 </a:solidFill>
                 <a:latin typeface="Amiri" pitchFamily="2" charset="-78"/>
+                <a:ea typeface="Amiri" pitchFamily="2" charset="-78"/>
                 <a:cs typeface="Amiri" pitchFamily="2" charset="-78"/>
               </a:rPr>
               <a:t>مَا أَخْطَرُ مُشْكِلَةٍ بِيئِيَّةٍ فِي رَأْيِكَ؟</a:t>
@@ -14319,6 +14430,7 @@
                   <a:srgbClr val="1B3B6F"/>
                 </a:solidFill>
                 <a:latin typeface="Amiri" pitchFamily="2" charset="-78"/>
+                <a:ea typeface="Amiri" pitchFamily="2" charset="-78"/>
                 <a:cs typeface="Amiri" pitchFamily="2" charset="-78"/>
               </a:rPr>
               <a:t>يَزْدَادُ عَدَدُ السَّيَّارَاتِ وَالمَصَانِعِ، مِمَّا يُؤَدِّي إِلَى ارْتِفَاعِ نِسْبَةِ الغَازَاتِ الضَّارَّةِ فِي الجَوِّ.</a:t>
@@ -14395,6 +14507,7 @@
                   <a:srgbClr val="1B3B6F"/>
                 </a:solidFill>
                 <a:latin typeface="Amiri" pitchFamily="2" charset="-78"/>
+                <a:ea typeface="Amiri" pitchFamily="2" charset="-78"/>
                 <a:cs typeface="Amiri" pitchFamily="2" charset="-78"/>
               </a:rPr>
               <a:t>وَمَا أَسْبَابُهُ؟</a:t>
@@ -14498,6 +14611,7 @@
                   <a:srgbClr val="1B3B6F"/>
                 </a:solidFill>
                 <a:latin typeface="Amiri" pitchFamily="2" charset="-78"/>
+                <a:ea typeface="Amiri" pitchFamily="2" charset="-78"/>
                 <a:cs typeface="Amiri" pitchFamily="2" charset="-78"/>
               </a:rPr>
               <a:t>مِنْ نَاحِيَةٍ، تَسْمَحُ الحُكُومَاتُ لِلْمَصَانِعِ بِالتَّلْوِيثِ، وَمِنْ نَاحِيَةٍ أُخْرَى، نَسْتَخْدِمُ نَحْنُ السَّيَّارَةَ حَتَّى لِلْمَسَافَاتِ القَصِيرَةِ.</a:t>
@@ -14574,6 +14688,7 @@
                   <a:srgbClr val="1B3B6F"/>
                 </a:solidFill>
                 <a:latin typeface="Amiri" pitchFamily="2" charset="-78"/>
+                <a:ea typeface="Amiri" pitchFamily="2" charset="-78"/>
                 <a:cs typeface="Amiri" pitchFamily="2" charset="-78"/>
               </a:rPr>
               <a:t>هَلِ المَسْؤُولُ الحُكُومَاتُ أَمِ الأَفْرَادُ؟</a:t>
@@ -14677,6 +14792,7 @@
                   <a:srgbClr val="1B3B6F"/>
                 </a:solidFill>
                 <a:latin typeface="Amiri" pitchFamily="2" charset="-78"/>
+                <a:ea typeface="Amiri" pitchFamily="2" charset="-78"/>
                 <a:cs typeface="Amiri" pitchFamily="2" charset="-78"/>
               </a:rPr>
               <a:t>صَحِيحٌ أَنَّهَا تُوَفِّرُ الوَظَائِفَ، غَيْرَ أَنَّ صِحَّةَ العُمَّالِ أَنْفُسِهِمْ تَتَضَرَّرُ مِنْ هٰذَا الدُّخَانِ.</a:t>
@@ -14753,6 +14869,7 @@
                   <a:srgbClr val="1B3B6F"/>
                 </a:solidFill>
                 <a:latin typeface="Amiri" pitchFamily="2" charset="-78"/>
+                <a:ea typeface="Amiri" pitchFamily="2" charset="-78"/>
                 <a:cs typeface="Amiri" pitchFamily="2" charset="-78"/>
               </a:rPr>
               <a:t>لٰكِنَّ المَصَانِعَ تُوَفِّرُ الوَظَائِفَ!</a:t>
@@ -14856,6 +14973,7 @@
                   <a:srgbClr val="1B3B6F"/>
                 </a:solidFill>
                 <a:latin typeface="Amiri" pitchFamily="2" charset="-78"/>
+                <a:ea typeface="Amiri" pitchFamily="2" charset="-78"/>
                 <a:cs typeface="Amiri" pitchFamily="2" charset="-78"/>
               </a:rPr>
               <a:t>لَوْ لَمْ تُوجَدْ سَيَّارَاتٌ، لَكَانَتِ المُدُنُ أَهْدَأَ وَأَنْظَفَ، وَلَمَشَى النَّاسُ أَكْثَرَ.</a:t>
@@ -14932,6 +15050,7 @@
                   <a:srgbClr val="1B3B6F"/>
                 </a:solidFill>
                 <a:latin typeface="Amiri" pitchFamily="2" charset="-78"/>
+                <a:ea typeface="Amiri" pitchFamily="2" charset="-78"/>
                 <a:cs typeface="Amiri" pitchFamily="2" charset="-78"/>
               </a:rPr>
               <a:t>لَوْ لَمْ تُوجَدْ سَيَّارَاتٌ، كَيْفَ تَكُونُ المُدُنُ؟</a:t>
@@ -15141,6 +15260,7 @@
                   <a:srgbClr val="D4AF37"/>
                 </a:solidFill>
                 <a:latin typeface="Amiri" pitchFamily="2" charset="-78"/>
+                <a:ea typeface="Amiri" pitchFamily="2" charset="-78"/>
                 <a:cs typeface="Amiri" pitchFamily="2" charset="-78"/>
               </a:rPr>
               <a:t>م</a:t>
@@ -15461,6 +15581,7 @@
                   <a:srgbClr val="8A6D1E"/>
                 </a:solidFill>
                 <a:latin typeface="Amiri" pitchFamily="2" charset="-78"/>
+                <a:ea typeface="Amiri" pitchFamily="2" charset="-78"/>
                 <a:cs typeface="Amiri" pitchFamily="2" charset="-78"/>
               </a:rPr>
               <a:t>البِيئَةُ فِي مَدِينَتِي</a:t>
@@ -15741,6 +15862,7 @@
                   <a:srgbClr val="1B3B6F"/>
                 </a:solidFill>
                 <a:latin typeface="Amiri" pitchFamily="2" charset="-78"/>
+                <a:ea typeface="Amiri" pitchFamily="2" charset="-78"/>
                 <a:cs typeface="Amiri" pitchFamily="2" charset="-78"/>
               </a:rPr>
               <a:t>نَعَمْ / لَا، مَدِينَتِي …</a:t>
@@ -15817,6 +15939,7 @@
                   <a:srgbClr val="1B3B6F"/>
                 </a:solidFill>
                 <a:latin typeface="Amiri" pitchFamily="2" charset="-78"/>
+                <a:ea typeface="Amiri" pitchFamily="2" charset="-78"/>
                 <a:cs typeface="Amiri" pitchFamily="2" charset="-78"/>
               </a:rPr>
               <a:t>هَلْ مَدِينَتُكَ نَظِيفَةٌ؟</a:t>
@@ -15985,6 +16108,7 @@
                   <a:srgbClr val="1B3B6F"/>
                 </a:solidFill>
                 <a:latin typeface="Amiri" pitchFamily="2" charset="-78"/>
+                <a:ea typeface="Amiri" pitchFamily="2" charset="-78"/>
                 <a:cs typeface="Amiri" pitchFamily="2" charset="-78"/>
               </a:rPr>
               <a:t>المُشْكِلَةُ الكَبِيرَةُ …</a:t>
@@ -16061,6 +16185,7 @@
                   <a:srgbClr val="1B3B6F"/>
                 </a:solidFill>
                 <a:latin typeface="Amiri" pitchFamily="2" charset="-78"/>
+                <a:ea typeface="Amiri" pitchFamily="2" charset="-78"/>
                 <a:cs typeface="Amiri" pitchFamily="2" charset="-78"/>
               </a:rPr>
               <a:t>مَا المُشْكِلَةُ الكَبِيرَةُ فِي مَدِينَتِكَ؟</a:t>
@@ -16229,6 +16354,7 @@
                   <a:srgbClr val="1B3B6F"/>
                 </a:solidFill>
                 <a:latin typeface="Amiri" pitchFamily="2" charset="-78"/>
+                <a:ea typeface="Amiri" pitchFamily="2" charset="-78"/>
                 <a:cs typeface="Amiri" pitchFamily="2" charset="-78"/>
               </a:rPr>
               <a:t>لَا، الهَوَاءُ … بِسَبَبِ …</a:t>
@@ -16305,6 +16431,7 @@
                   <a:srgbClr val="1B3B6F"/>
                 </a:solidFill>
                 <a:latin typeface="Amiri" pitchFamily="2" charset="-78"/>
+                <a:ea typeface="Amiri" pitchFamily="2" charset="-78"/>
                 <a:cs typeface="Amiri" pitchFamily="2" charset="-78"/>
               </a:rPr>
               <a:t>هَلِ الهَوَاءُ نَظِيفٌ؟</a:t>
@@ -16473,6 +16600,7 @@
                   <a:srgbClr val="1B3B6F"/>
                 </a:solidFill>
                 <a:latin typeface="Amiri" pitchFamily="2" charset="-78"/>
+                <a:ea typeface="Amiri" pitchFamily="2" charset="-78"/>
                 <a:cs typeface="Amiri" pitchFamily="2" charset="-78"/>
               </a:rPr>
               <a:t>نَعَمْ، أَرْمِي …</a:t>
@@ -16549,6 +16677,7 @@
                   <a:srgbClr val="1B3B6F"/>
                 </a:solidFill>
                 <a:latin typeface="Amiri" pitchFamily="2" charset="-78"/>
+                <a:ea typeface="Amiri" pitchFamily="2" charset="-78"/>
                 <a:cs typeface="Amiri" pitchFamily="2" charset="-78"/>
               </a:rPr>
               <a:t>هَلْ تَرْمِي النُّفَايَاتِ فِي السَّلَّةِ؟</a:t>
@@ -16717,6 +16846,7 @@
                   <a:srgbClr val="1B3B6F"/>
                 </a:solidFill>
                 <a:latin typeface="Amiri" pitchFamily="2" charset="-78"/>
+                <a:ea typeface="Amiri" pitchFamily="2" charset="-78"/>
                 <a:cs typeface="Amiri" pitchFamily="2" charset="-78"/>
               </a:rPr>
               <a:t>نَعَمْ، البِيئَةُ مُهِمَّةٌ لِأَنَّ …</a:t>
@@ -16793,6 +16923,7 @@
                   <a:srgbClr val="1B3B6F"/>
                 </a:solidFill>
                 <a:latin typeface="Amiri" pitchFamily="2" charset="-78"/>
+                <a:ea typeface="Amiri" pitchFamily="2" charset="-78"/>
                 <a:cs typeface="Amiri" pitchFamily="2" charset="-78"/>
               </a:rPr>
               <a:t>هَلِ البِيئَةُ مُهِمَّةٌ لَكَ؟</a:t>
@@ -16947,6 +17078,7 @@
                   <a:srgbClr val="1B3B6F"/>
                 </a:solidFill>
                 <a:latin typeface="Amiri" pitchFamily="2" charset="-78"/>
+                <a:ea typeface="Amiri" pitchFamily="2" charset="-78"/>
                 <a:cs typeface="Amiri" pitchFamily="2" charset="-78"/>
               </a:rPr>
               <a:t>عَفْوًا، هَلْ يُمْكِنُ أَنْ تُعِيدَ السُّؤَالَ؟</a:t>
@@ -17080,6 +17212,7 @@
                   <a:srgbClr val="D4AF37"/>
                 </a:solidFill>
                 <a:latin typeface="Amiri" pitchFamily="2" charset="-78"/>
+                <a:ea typeface="Amiri" pitchFamily="2" charset="-78"/>
                 <a:cs typeface="Amiri" pitchFamily="2" charset="-78"/>
               </a:rPr>
               <a:t>م</a:t>
@@ -17400,6 +17533,7 @@
                   <a:srgbClr val="8A6D1E"/>
                 </a:solidFill>
                 <a:latin typeface="Amiri" pitchFamily="2" charset="-78"/>
+                <a:ea typeface="Amiri" pitchFamily="2" charset="-78"/>
                 <a:cs typeface="Amiri" pitchFamily="2" charset="-78"/>
               </a:rPr>
               <a:t>أَسْبَابٌ وَنَتَائِجُ</a:t>
@@ -17680,6 +17814,7 @@
                   <a:srgbClr val="1B3B6F"/>
                 </a:solidFill>
                 <a:latin typeface="Amiri" pitchFamily="2" charset="-78"/>
+                <a:ea typeface="Amiri" pitchFamily="2" charset="-78"/>
                 <a:cs typeface="Amiri" pitchFamily="2" charset="-78"/>
               </a:rPr>
               <a:t>مِنْ أَسْبَابِهِ … وَ…</a:t>
@@ -17756,6 +17891,7 @@
                   <a:srgbClr val="1B3B6F"/>
                 </a:solidFill>
                 <a:latin typeface="Amiri" pitchFamily="2" charset="-78"/>
+                <a:ea typeface="Amiri" pitchFamily="2" charset="-78"/>
                 <a:cs typeface="Amiri" pitchFamily="2" charset="-78"/>
               </a:rPr>
               <a:t>مَا أَسْبَابُ تَلَوُّثِ الهَوَاءِ فِي المُدُنِ؟</a:t>
@@ -17859,6 +17995,7 @@
                   <a:srgbClr val="1B3B6F"/>
                 </a:solidFill>
                 <a:latin typeface="Amiri" pitchFamily="2" charset="-78"/>
+                <a:ea typeface="Amiri" pitchFamily="2" charset="-78"/>
                 <a:cs typeface="Amiri" pitchFamily="2" charset="-78"/>
               </a:rPr>
               <a:t>يُؤَدِّي البْلَاسْتِيكُ إِلَى …</a:t>
@@ -17935,6 +18072,7 @@
                   <a:srgbClr val="1B3B6F"/>
                 </a:solidFill>
                 <a:latin typeface="Amiri" pitchFamily="2" charset="-78"/>
+                <a:ea typeface="Amiri" pitchFamily="2" charset="-78"/>
                 <a:cs typeface="Amiri" pitchFamily="2" charset="-78"/>
               </a:rPr>
               <a:t>كَيْفَ يُؤَثِّرُ البْلَاسْتِيكُ فِي البِحَارِ؟</a:t>
@@ -18038,6 +18176,7 @@
                   <a:srgbClr val="1B3B6F"/>
                 </a:solidFill>
                 <a:latin typeface="Amiri" pitchFamily="2" charset="-78"/>
+                <a:ea typeface="Amiri" pitchFamily="2" charset="-78"/>
                 <a:cs typeface="Amiri" pitchFamily="2" charset="-78"/>
               </a:rPr>
               <a:t>رَأَيْتُ … كَانَ …</a:t>
@@ -18114,6 +18253,7 @@
                   <a:srgbClr val="1B3B6F"/>
                 </a:solidFill>
                 <a:latin typeface="Amiri" pitchFamily="2" charset="-78"/>
+                <a:ea typeface="Amiri" pitchFamily="2" charset="-78"/>
                 <a:cs typeface="Amiri" pitchFamily="2" charset="-78"/>
               </a:rPr>
               <a:t>صِفْ مَكَانًا مُلَوَّثًا رَأَيْتَهُ.</a:t>
@@ -18217,6 +18357,7 @@
                   <a:srgbClr val="1B3B6F"/>
                 </a:solidFill>
                 <a:latin typeface="Amiri" pitchFamily="2" charset="-78"/>
+                <a:ea typeface="Amiri" pitchFamily="2" charset="-78"/>
                 <a:cs typeface="Amiri" pitchFamily="2" charset="-78"/>
               </a:rPr>
               <a:t>نَعَمْ، لِأَنَّهُ يُسَبِّبُ …</a:t>
@@ -18293,6 +18434,7 @@
                   <a:srgbClr val="1B3B6F"/>
                 </a:solidFill>
                 <a:latin typeface="Amiri" pitchFamily="2" charset="-78"/>
+                <a:ea typeface="Amiri" pitchFamily="2" charset="-78"/>
                 <a:cs typeface="Amiri" pitchFamily="2" charset="-78"/>
               </a:rPr>
               <a:t>هَلِ الضَّجِيجُ مُشْكِلَةٌ بِيئِيَّةٌ أَيْضًا؟</a:t>
@@ -18396,6 +18538,7 @@
                   <a:srgbClr val="1B3B6F"/>
                 </a:solidFill>
                 <a:latin typeface="Amiri" pitchFamily="2" charset="-78"/>
+                <a:ea typeface="Amiri" pitchFamily="2" charset="-78"/>
                 <a:cs typeface="Amiri" pitchFamily="2" charset="-78"/>
               </a:rPr>
               <a:t>تُقْطَعُ الغَابَاتُ مِنْ أَجْلِ …</a:t>
@@ -18472,6 +18615,7 @@
                   <a:srgbClr val="1B3B6F"/>
                 </a:solidFill>
                 <a:latin typeface="Amiri" pitchFamily="2" charset="-78"/>
+                <a:ea typeface="Amiri" pitchFamily="2" charset="-78"/>
                 <a:cs typeface="Amiri" pitchFamily="2" charset="-78"/>
               </a:rPr>
               <a:t>لِمَاذَا تُقْطَعُ الغَابَاتُ؟</a:t>
@@ -18681,6 +18825,7 @@
                   <a:srgbClr val="D4AF37"/>
                 </a:solidFill>
                 <a:latin typeface="Amiri" pitchFamily="2" charset="-78"/>
+                <a:ea typeface="Amiri" pitchFamily="2" charset="-78"/>
                 <a:cs typeface="Amiri" pitchFamily="2" charset="-78"/>
               </a:rPr>
               <a:t>م</a:t>
@@ -19001,6 +19146,7 @@
                   <a:srgbClr val="8A6D1E"/>
                 </a:solidFill>
                 <a:latin typeface="Amiri" pitchFamily="2" charset="-78"/>
+                <a:ea typeface="Amiri" pitchFamily="2" charset="-78"/>
                 <a:cs typeface="Amiri" pitchFamily="2" charset="-78"/>
               </a:rPr>
               <a:t>الإِنْسَانُ وَمَشَاكِلُ البِيئَةِ</a:t>
@@ -19281,6 +19427,7 @@
                   <a:srgbClr val="1B3B6F"/>
                 </a:solidFill>
                 <a:latin typeface="Amiri" pitchFamily="2" charset="-78"/>
+                <a:ea typeface="Amiri" pitchFamily="2" charset="-78"/>
                 <a:cs typeface="Amiri" pitchFamily="2" charset="-78"/>
               </a:rPr>
               <a:t>فِي رَأْيِي … لِأَنَّ …</a:t>
@@ -19357,6 +19504,7 @@
                   <a:srgbClr val="1B3B6F"/>
                 </a:solidFill>
                 <a:latin typeface="Amiri" pitchFamily="2" charset="-78"/>
+                <a:ea typeface="Amiri" pitchFamily="2" charset="-78"/>
                 <a:cs typeface="Amiri" pitchFamily="2" charset="-78"/>
               </a:rPr>
               <a:t>هَلِ الدُّوَلُ الغَنِيَّةُ مَسْؤُولَةٌ أَكْثَرَ مِنَ الدُّوَلِ الفَقِيرَةِ؟</a:t>
@@ -19460,6 +19608,7 @@
                   <a:srgbClr val="1B3B6F"/>
                 </a:solidFill>
                 <a:latin typeface="Amiri" pitchFamily="2" charset="-78"/>
+                <a:ea typeface="Amiri" pitchFamily="2" charset="-78"/>
                 <a:cs typeface="Amiri" pitchFamily="2" charset="-78"/>
               </a:rPr>
               <a:t>مِنْ نَاحِيَةٍ … وَمِنْ نَاحِيَةٍ أُخْرَى …</a:t>
@@ -19536,6 +19685,7 @@
                   <a:srgbClr val="1B3B6F"/>
                 </a:solidFill>
                 <a:latin typeface="Amiri" pitchFamily="2" charset="-78"/>
+                <a:ea typeface="Amiri" pitchFamily="2" charset="-78"/>
                 <a:cs typeface="Amiri" pitchFamily="2" charset="-78"/>
               </a:rPr>
               <a:t>هَلِ التِّكْنُولُوجْيَا سَبَبُ المُشْكِلَةِ أَمْ حَلُّهَا؟</a:t>
@@ -19639,6 +19789,7 @@
                   <a:srgbClr val="1B3B6F"/>
                 </a:solidFill>
                 <a:latin typeface="Amiri" pitchFamily="2" charset="-78"/>
+                <a:ea typeface="Amiri" pitchFamily="2" charset="-78"/>
                 <a:cs typeface="Amiri" pitchFamily="2" charset="-78"/>
               </a:rPr>
               <a:t>كَانَتْ … أَمَّا الآنَ فَقَدْ …</a:t>
@@ -19715,6 +19866,7 @@
                   <a:srgbClr val="1B3B6F"/>
                 </a:solidFill>
                 <a:latin typeface="Amiri" pitchFamily="2" charset="-78"/>
+                <a:ea typeface="Amiri" pitchFamily="2" charset="-78"/>
                 <a:cs typeface="Amiri" pitchFamily="2" charset="-78"/>
               </a:rPr>
               <a:t>كَيْفَ تَغَيَّرَتْ مِنْطَقَتُكَ فِي السَّنَوَاتِ الأَخِيرَةِ؟</a:t>
@@ -19818,6 +19970,7 @@
                   <a:srgbClr val="1B3B6F"/>
                 </a:solidFill>
                 <a:latin typeface="Amiri" pitchFamily="2" charset="-78"/>
+                <a:ea typeface="Amiri" pitchFamily="2" charset="-78"/>
                 <a:cs typeface="Amiri" pitchFamily="2" charset="-78"/>
               </a:rPr>
               <a:t>صَحِيحٌ أَنَّ … غَيْرَ أَنَّ …</a:t>
@@ -19894,6 +20047,7 @@
                   <a:srgbClr val="1B3B6F"/>
                 </a:solidFill>
                 <a:latin typeface="Amiri" pitchFamily="2" charset="-78"/>
+                <a:ea typeface="Amiri" pitchFamily="2" charset="-78"/>
                 <a:cs typeface="Amiri" pitchFamily="2" charset="-78"/>
               </a:rPr>
               <a:t>هَلْ يَهْتَمُّ الشَّبَابُ بِالبِيئَةِ أَكْثَرَ مِنَ الكِبَارِ؟</a:t>
@@ -19997,6 +20151,7 @@
                   <a:srgbClr val="1B3B6F"/>
                 </a:solidFill>
                 <a:latin typeface="Amiri" pitchFamily="2" charset="-78"/>
+                <a:ea typeface="Amiri" pitchFamily="2" charset="-78"/>
                 <a:cs typeface="Amiri" pitchFamily="2" charset="-78"/>
               </a:rPr>
               <a:t>إِذَا لَمْ نُغَيِّرْ …، فَسَتَخْتَفِي …</a:t>
@@ -20073,6 +20228,7 @@
                   <a:srgbClr val="1B3B6F"/>
                 </a:solidFill>
                 <a:latin typeface="Amiri" pitchFamily="2" charset="-78"/>
+                <a:ea typeface="Amiri" pitchFamily="2" charset="-78"/>
                 <a:cs typeface="Amiri" pitchFamily="2" charset="-78"/>
               </a:rPr>
               <a:t>لَوْ لَمْ نُغَيِّرْ عَادَاتِنَا، كَيْفَ سَيَكُونُ العَالَمُ بَعْدَ مِئَةِ سَنَةٍ؟</a:t>
@@ -20282,6 +20438,7 @@
                   <a:srgbClr val="D4AF37"/>
                 </a:solidFill>
                 <a:latin typeface="Amiri" pitchFamily="2" charset="-78"/>
+                <a:ea typeface="Amiri" pitchFamily="2" charset="-78"/>
                 <a:cs typeface="Amiri" pitchFamily="2" charset="-78"/>
               </a:rPr>
               <a:t>م</a:t>
@@ -20602,6 +20759,7 @@
                   <a:srgbClr val="8A6D1E"/>
                 </a:solidFill>
                 <a:latin typeface="Amiri" pitchFamily="2" charset="-78"/>
+                <a:ea typeface="Amiri" pitchFamily="2" charset="-78"/>
                 <a:cs typeface="Amiri" pitchFamily="2" charset="-78"/>
               </a:rPr>
               <a:t>آدَابُ الصَّفِّ</a:t>
@@ -22133,6 +22291,7 @@
                   <a:srgbClr val="D4AF37"/>
                 </a:solidFill>
                 <a:latin typeface="Amiri" pitchFamily="2" charset="-78"/>
+                <a:ea typeface="Amiri" pitchFamily="2" charset="-78"/>
                 <a:cs typeface="Amiri" pitchFamily="2" charset="-78"/>
               </a:rPr>
               <a:t>م</a:t>
@@ -22453,6 +22612,7 @@
                   <a:srgbClr val="8A6D1E"/>
                 </a:solidFill>
                 <a:latin typeface="Amiri" pitchFamily="2" charset="-78"/>
+                <a:ea typeface="Amiri" pitchFamily="2" charset="-78"/>
                 <a:cs typeface="Amiri" pitchFamily="2" charset="-78"/>
               </a:rPr>
               <a:t>نَمُوذَجُ الإِجَابَةِ</a:t>
@@ -22695,6 +22855,7 @@
                   <a:srgbClr val="1B3B6F"/>
                 </a:solidFill>
                 <a:latin typeface="Amiri" pitchFamily="2" charset="-78"/>
+                <a:ea typeface="Amiri" pitchFamily="2" charset="-78"/>
                 <a:cs typeface="Amiri" pitchFamily="2" charset="-78"/>
               </a:rPr>
               <a:t>لَا، مَدِينَتِي لَيْسَتْ نَظِيفَةً جِدًّا.</a:t>
@@ -22771,6 +22932,7 @@
                   <a:srgbClr val="1B3B6F"/>
                 </a:solidFill>
                 <a:latin typeface="Amiri" pitchFamily="2" charset="-78"/>
+                <a:ea typeface="Amiri" pitchFamily="2" charset="-78"/>
                 <a:cs typeface="Amiri" pitchFamily="2" charset="-78"/>
               </a:rPr>
               <a:t>هَلْ مَدِينَتُكَ نَظِيفَةٌ؟</a:t>
@@ -22874,6 +23036,7 @@
                   <a:srgbClr val="1B3B6F"/>
                 </a:solidFill>
                 <a:latin typeface="Amiri" pitchFamily="2" charset="-78"/>
+                <a:ea typeface="Amiri" pitchFamily="2" charset="-78"/>
                 <a:cs typeface="Amiri" pitchFamily="2" charset="-78"/>
               </a:rPr>
               <a:t>المُشْكِلَةُ الكَبِيرَةُ هِيَ النُّفَايَاتُ فِي الشَّوَارِعِ.</a:t>
@@ -22950,6 +23113,7 @@
                   <a:srgbClr val="1B3B6F"/>
                 </a:solidFill>
                 <a:latin typeface="Amiri" pitchFamily="2" charset="-78"/>
+                <a:ea typeface="Amiri" pitchFamily="2" charset="-78"/>
                 <a:cs typeface="Amiri" pitchFamily="2" charset="-78"/>
               </a:rPr>
               <a:t>مَا المُشْكِلَةُ الكَبِيرَةُ فِي مَدِينَتِكَ؟</a:t>
@@ -23053,6 +23217,7 @@
                   <a:srgbClr val="1B3B6F"/>
                 </a:solidFill>
                 <a:latin typeface="Amiri" pitchFamily="2" charset="-78"/>
+                <a:ea typeface="Amiri" pitchFamily="2" charset="-78"/>
                 <a:cs typeface="Amiri" pitchFamily="2" charset="-78"/>
               </a:rPr>
               <a:t>لَا، الهَوَاءُ مُلَوَّثٌ بِسَبَبِ السَّيَّارَاتِ.</a:t>
@@ -23129,6 +23294,7 @@
                   <a:srgbClr val="1B3B6F"/>
                 </a:solidFill>
                 <a:latin typeface="Amiri" pitchFamily="2" charset="-78"/>
+                <a:ea typeface="Amiri" pitchFamily="2" charset="-78"/>
                 <a:cs typeface="Amiri" pitchFamily="2" charset="-78"/>
               </a:rPr>
               <a:t>هَلِ الهَوَاءُ نَظِيفٌ؟</a:t>
@@ -23232,6 +23398,7 @@
                   <a:srgbClr val="1B3B6F"/>
                 </a:solidFill>
                 <a:latin typeface="Amiri" pitchFamily="2" charset="-78"/>
+                <a:ea typeface="Amiri" pitchFamily="2" charset="-78"/>
                 <a:cs typeface="Amiri" pitchFamily="2" charset="-78"/>
               </a:rPr>
               <a:t>نَعَمْ، أَرْمِي النُّفَايَاتِ فِي السَّلَّةِ دَائِمًا.</a:t>
@@ -23308,6 +23475,7 @@
                   <a:srgbClr val="1B3B6F"/>
                 </a:solidFill>
                 <a:latin typeface="Amiri" pitchFamily="2" charset="-78"/>
+                <a:ea typeface="Amiri" pitchFamily="2" charset="-78"/>
                 <a:cs typeface="Amiri" pitchFamily="2" charset="-78"/>
               </a:rPr>
               <a:t>هَلْ تَرْمِي النُّفَايَاتِ فِي السَّلَّةِ؟</a:t>
@@ -23411,6 +23579,7 @@
                   <a:srgbClr val="1B3B6F"/>
                 </a:solidFill>
                 <a:latin typeface="Amiri" pitchFamily="2" charset="-78"/>
+                <a:ea typeface="Amiri" pitchFamily="2" charset="-78"/>
                 <a:cs typeface="Amiri" pitchFamily="2" charset="-78"/>
               </a:rPr>
               <a:t>نَعَمْ، البِيئَةُ مُهِمَّةٌ لِأَنَّهَا بَيْتُنَا.</a:t>
@@ -23487,6 +23656,7 @@
                   <a:srgbClr val="1B3B6F"/>
                 </a:solidFill>
                 <a:latin typeface="Amiri" pitchFamily="2" charset="-78"/>
+                <a:ea typeface="Amiri" pitchFamily="2" charset="-78"/>
                 <a:cs typeface="Amiri" pitchFamily="2" charset="-78"/>
               </a:rPr>
               <a:t>هَلِ البِيئَةُ مُهِمَّةٌ لَكَ؟</a:t>
@@ -23696,6 +23866,7 @@
                   <a:srgbClr val="D4AF37"/>
                 </a:solidFill>
                 <a:latin typeface="Amiri" pitchFamily="2" charset="-78"/>
+                <a:ea typeface="Amiri" pitchFamily="2" charset="-78"/>
                 <a:cs typeface="Amiri" pitchFamily="2" charset="-78"/>
               </a:rPr>
               <a:t>م</a:t>
@@ -24016,6 +24187,7 @@
                   <a:srgbClr val="8A6D1E"/>
                 </a:solidFill>
                 <a:latin typeface="Amiri" pitchFamily="2" charset="-78"/>
+                <a:ea typeface="Amiri" pitchFamily="2" charset="-78"/>
                 <a:cs typeface="Amiri" pitchFamily="2" charset="-78"/>
               </a:rPr>
               <a:t>نَمُوذَجُ الإِجَابَةِ</a:t>
@@ -24258,6 +24430,7 @@
                   <a:srgbClr val="1B3B6F"/>
                 </a:solidFill>
                 <a:latin typeface="Amiri" pitchFamily="2" charset="-78"/>
+                <a:ea typeface="Amiri" pitchFamily="2" charset="-78"/>
                 <a:cs typeface="Amiri" pitchFamily="2" charset="-78"/>
               </a:rPr>
               <a:t>مِنْ أَسْبَابِهِ دُخَانُ السَّيَّارَاتِ وَالمَصَانِعِ، وَقِلَّةُ الحَدَائِقِ وَالأَشْجَارِ.</a:t>
@@ -24334,6 +24507,7 @@
                   <a:srgbClr val="1B3B6F"/>
                 </a:solidFill>
                 <a:latin typeface="Amiri" pitchFamily="2" charset="-78"/>
+                <a:ea typeface="Amiri" pitchFamily="2" charset="-78"/>
                 <a:cs typeface="Amiri" pitchFamily="2" charset="-78"/>
               </a:rPr>
               <a:t>مَا أَسْبَابُ تَلَوُّثِ الهَوَاءِ فِي المُدُنِ؟</a:t>
@@ -24437,6 +24611,7 @@
                   <a:srgbClr val="1B3B6F"/>
                 </a:solidFill>
                 <a:latin typeface="Amiri" pitchFamily="2" charset="-78"/>
+                <a:ea typeface="Amiri" pitchFamily="2" charset="-78"/>
                 <a:cs typeface="Amiri" pitchFamily="2" charset="-78"/>
               </a:rPr>
               <a:t>يُؤَدِّي البْلَاسْتِيكُ إِلَى مَوْتِ السَّلَاحِفِ وَالأَسْمَاكِ، لِأَنَّهَا تَظُنُّهُ طَعَامًا.</a:t>
@@ -24513,6 +24688,7 @@
                   <a:srgbClr val="1B3B6F"/>
                 </a:solidFill>
                 <a:latin typeface="Amiri" pitchFamily="2" charset="-78"/>
+                <a:ea typeface="Amiri" pitchFamily="2" charset="-78"/>
                 <a:cs typeface="Amiri" pitchFamily="2" charset="-78"/>
               </a:rPr>
               <a:t>كَيْفَ يُؤَثِّرُ البْلَاسْتِيكُ فِي البِحَارِ؟</a:t>
@@ -24616,6 +24792,7 @@
                   <a:srgbClr val="1B3B6F"/>
                 </a:solidFill>
                 <a:latin typeface="Amiri" pitchFamily="2" charset="-78"/>
+                <a:ea typeface="Amiri" pitchFamily="2" charset="-78"/>
                 <a:cs typeface="Amiri" pitchFamily="2" charset="-78"/>
               </a:rPr>
               <a:t>رَأَيْتُ قَنَاةً فِي مَدِينَتِنَا كَانَتْ مَمْلُوءَةً بِالأَكْيَاسِ وَالعُلَبِ، وَكَانَتْ رَائِحَتُهَا كَرِيهَةً.</a:t>
@@ -24692,6 +24869,7 @@
                   <a:srgbClr val="1B3B6F"/>
                 </a:solidFill>
                 <a:latin typeface="Amiri" pitchFamily="2" charset="-78"/>
+                <a:ea typeface="Amiri" pitchFamily="2" charset="-78"/>
                 <a:cs typeface="Amiri" pitchFamily="2" charset="-78"/>
               </a:rPr>
               <a:t>صِفْ مَكَانًا مُلَوَّثًا رَأَيْتَهُ.</a:t>
@@ -24795,6 +24973,7 @@
                   <a:srgbClr val="1B3B6F"/>
                 </a:solidFill>
                 <a:latin typeface="Amiri" pitchFamily="2" charset="-78"/>
+                <a:ea typeface="Amiri" pitchFamily="2" charset="-78"/>
                 <a:cs typeface="Amiri" pitchFamily="2" charset="-78"/>
               </a:rPr>
               <a:t>نَعَمْ، لِأَنَّهُ يُسَبِّبُ التَّوَتُّرَ وَقِلَّةَ النَّوْمِ، وَيُخِيفُ الطُّيُورَ أَيْضًا.</a:t>
@@ -24871,6 +25050,7 @@
                   <a:srgbClr val="1B3B6F"/>
                 </a:solidFill>
                 <a:latin typeface="Amiri" pitchFamily="2" charset="-78"/>
+                <a:ea typeface="Amiri" pitchFamily="2" charset="-78"/>
                 <a:cs typeface="Amiri" pitchFamily="2" charset="-78"/>
               </a:rPr>
               <a:t>هَلِ الضَّجِيجُ مُشْكِلَةٌ بِيئِيَّةٌ أَيْضًا؟</a:t>
@@ -24974,6 +25154,7 @@
                   <a:srgbClr val="1B3B6F"/>
                 </a:solidFill>
                 <a:latin typeface="Amiri" pitchFamily="2" charset="-78"/>
+                <a:ea typeface="Amiri" pitchFamily="2" charset="-78"/>
                 <a:cs typeface="Amiri" pitchFamily="2" charset="-78"/>
               </a:rPr>
               <a:t>تُقْطَعُ الغَابَاتُ مِنْ أَجْلِ الخَشَبِ وَالزِّرَاعَةِ، مِمَّا يُهَدِّدُ الحَيَوَانَاتِ.</a:t>
@@ -25050,6 +25231,7 @@
                   <a:srgbClr val="1B3B6F"/>
                 </a:solidFill>
                 <a:latin typeface="Amiri" pitchFamily="2" charset="-78"/>
+                <a:ea typeface="Amiri" pitchFamily="2" charset="-78"/>
                 <a:cs typeface="Amiri" pitchFamily="2" charset="-78"/>
               </a:rPr>
               <a:t>لِمَاذَا تُقْطَعُ الغَابَاتُ؟</a:t>
@@ -25259,6 +25441,7 @@
                   <a:srgbClr val="D4AF37"/>
                 </a:solidFill>
                 <a:latin typeface="Amiri" pitchFamily="2" charset="-78"/>
+                <a:ea typeface="Amiri" pitchFamily="2" charset="-78"/>
                 <a:cs typeface="Amiri" pitchFamily="2" charset="-78"/>
               </a:rPr>
               <a:t>م</a:t>
@@ -25579,6 +25762,7 @@
                   <a:srgbClr val="8A6D1E"/>
                 </a:solidFill>
                 <a:latin typeface="Amiri" pitchFamily="2" charset="-78"/>
+                <a:ea typeface="Amiri" pitchFamily="2" charset="-78"/>
                 <a:cs typeface="Amiri" pitchFamily="2" charset="-78"/>
               </a:rPr>
               <a:t>نَمُوذَجُ الإِجَابَةِ</a:t>
@@ -25821,6 +26005,7 @@
                   <a:srgbClr val="1B3B6F"/>
                 </a:solidFill>
                 <a:latin typeface="Amiri" pitchFamily="2" charset="-78"/>
+                <a:ea typeface="Amiri" pitchFamily="2" charset="-78"/>
                 <a:cs typeface="Amiri" pitchFamily="2" charset="-78"/>
               </a:rPr>
               <a:t>فِي رَأْيِي نَعَمْ، لِأَنَّهَا تُنْتِجُ وَتَسْتَهْلِكُ أَكْثَرَ بِكَثِيرٍ، وَلِأَنَّ مَصَانِعَهَا لَوَّثَتِ العَالَمَ مُنْذُ مِئَتَيْ سَنَةٍ.</a:t>
@@ -25900,6 +26085,7 @@
                   <a:srgbClr val="1B3B6F"/>
                 </a:solidFill>
                 <a:latin typeface="Amiri" pitchFamily="2" charset="-78"/>
+                <a:ea typeface="Amiri" pitchFamily="2" charset="-78"/>
                 <a:cs typeface="Amiri" pitchFamily="2" charset="-78"/>
               </a:rPr>
               <a:t>هَلِ الدُّوَلُ الغَنِيَّةُ مَسْؤُولَةٌ أَكْثَرَ مِنَ الدُّوَلِ الفَقِيرَةِ؟</a:t>
@@ -26003,6 +26189,7 @@
                   <a:srgbClr val="1B3B6F"/>
                 </a:solidFill>
                 <a:latin typeface="Amiri" pitchFamily="2" charset="-78"/>
+                <a:ea typeface="Amiri" pitchFamily="2" charset="-78"/>
                 <a:cs typeface="Amiri" pitchFamily="2" charset="-78"/>
               </a:rPr>
               <a:t>مِنْ نَاحِيَةٍ، الأَجْهِزَةُ القَدِيمَةُ تُرْمَى وَتُلَوِّثُ الأَرْضَ، وَمِنْ نَاحِيَةٍ أُخْرَى، السَّيَّارَاتُ الكَهْرَبَائِيَّةُ تُخَفِّفُ التَّلَوُّثَ.</a:t>
@@ -26079,6 +26266,7 @@
                   <a:srgbClr val="1B3B6F"/>
                 </a:solidFill>
                 <a:latin typeface="Amiri" pitchFamily="2" charset="-78"/>
+                <a:ea typeface="Amiri" pitchFamily="2" charset="-78"/>
                 <a:cs typeface="Amiri" pitchFamily="2" charset="-78"/>
               </a:rPr>
               <a:t>هَلِ التِّكْنُولُوجْيَا سَبَبُ المُشْكِلَةِ أَمْ حَلُّهَا؟</a:t>
@@ -26182,6 +26370,7 @@
                   <a:srgbClr val="1B3B6F"/>
                 </a:solidFill>
                 <a:latin typeface="Amiri" pitchFamily="2" charset="-78"/>
+                <a:ea typeface="Amiri" pitchFamily="2" charset="-78"/>
                 <a:cs typeface="Amiri" pitchFamily="2" charset="-78"/>
               </a:rPr>
               <a:t>كَانَتْ هُنَاكَ حُقُولٌ خَضْرَاءُ، أَمَّا الآنَ فَقَدْ بُنِيَ عَلَيْهَا طَرِيقٌ سَرِيعٌ، وَازْدَادَ الضَّجِيجُ وَالدُّخَانُ.</a:t>
@@ -26258,6 +26447,7 @@
                   <a:srgbClr val="1B3B6F"/>
                 </a:solidFill>
                 <a:latin typeface="Amiri" pitchFamily="2" charset="-78"/>
+                <a:ea typeface="Amiri" pitchFamily="2" charset="-78"/>
                 <a:cs typeface="Amiri" pitchFamily="2" charset="-78"/>
               </a:rPr>
               <a:t>كَيْفَ تَغَيَّرَتْ مِنْطَقَتُكَ فِي السَّنَوَاتِ الأَخِيرَةِ؟</a:t>
@@ -26467,6 +26657,7 @@
                   <a:srgbClr val="D4AF37"/>
                 </a:solidFill>
                 <a:latin typeface="Amiri" pitchFamily="2" charset="-78"/>
+                <a:ea typeface="Amiri" pitchFamily="2" charset="-78"/>
                 <a:cs typeface="Amiri" pitchFamily="2" charset="-78"/>
               </a:rPr>
               <a:t>م</a:t>
@@ -26787,6 +26978,7 @@
                   <a:srgbClr val="8A6D1E"/>
                 </a:solidFill>
                 <a:latin typeface="Amiri" pitchFamily="2" charset="-78"/>
+                <a:ea typeface="Amiri" pitchFamily="2" charset="-78"/>
                 <a:cs typeface="Amiri" pitchFamily="2" charset="-78"/>
               </a:rPr>
               <a:t>نَمُوذَجُ الإِجَابَةِ</a:t>
@@ -27029,6 +27221,7 @@
                   <a:srgbClr val="1B3B6F"/>
                 </a:solidFill>
                 <a:latin typeface="Amiri" pitchFamily="2" charset="-78"/>
+                <a:ea typeface="Amiri" pitchFamily="2" charset="-78"/>
                 <a:cs typeface="Amiri" pitchFamily="2" charset="-78"/>
               </a:rPr>
               <a:t>صَحِيحٌ أَنَّ الشَّبَابَ يَتَحَدَّثُونَ عَنْهَا كَثِيرًا، غَيْرَ أَنَّ بَعْضَهُمْ يَشْتَرِي مَلَابِسَ جَدِيدَةً كُلَّ أُسْبُوعٍ، مِمَّا يَضُرُّ بِالبِيئَةِ.</a:t>
@@ -27105,6 +27298,7 @@
                   <a:srgbClr val="1B3B6F"/>
                 </a:solidFill>
                 <a:latin typeface="Amiri" pitchFamily="2" charset="-78"/>
+                <a:ea typeface="Amiri" pitchFamily="2" charset="-78"/>
                 <a:cs typeface="Amiri" pitchFamily="2" charset="-78"/>
               </a:rPr>
               <a:t>هَلْ يَهْتَمُّ الشَّبَابُ بِالبِيئَةِ أَكْثَرَ مِنَ الكِبَارِ؟</a:t>
@@ -27208,6 +27402,7 @@
                   <a:srgbClr val="1B3B6F"/>
                 </a:solidFill>
                 <a:latin typeface="Amiri" pitchFamily="2" charset="-78"/>
+                <a:ea typeface="Amiri" pitchFamily="2" charset="-78"/>
                 <a:cs typeface="Amiri" pitchFamily="2" charset="-78"/>
               </a:rPr>
               <a:t>إِذَا لَمْ نُغَيِّرْ عَادَاتِنَا، فَسَتَخْتَفِي غَابَاتٌ كَثِيرَةٌ، وَسَتَغْرَقُ مُدُنٌ سَاحِلِيَّةٌ تَحْتَ البَحْرِ.</a:t>
@@ -27287,6 +27482,7 @@
                   <a:srgbClr val="1B3B6F"/>
                 </a:solidFill>
                 <a:latin typeface="Amiri" pitchFamily="2" charset="-78"/>
+                <a:ea typeface="Amiri" pitchFamily="2" charset="-78"/>
                 <a:cs typeface="Amiri" pitchFamily="2" charset="-78"/>
               </a:rPr>
               <a:t>لَوْ لَمْ نُغَيِّرْ عَادَاتِنَا، كَيْفَ سَيَكُونُ العَالَمُ بَعْدَ مِئَةِ سَنَةٍ؟</a:t>
@@ -27496,6 +27692,7 @@
                   <a:srgbClr val="D4AF37"/>
                 </a:solidFill>
                 <a:latin typeface="Amiri" pitchFamily="2" charset="-78"/>
+                <a:ea typeface="Amiri" pitchFamily="2" charset="-78"/>
                 <a:cs typeface="Amiri" pitchFamily="2" charset="-78"/>
               </a:rPr>
               <a:t>م</a:t>
@@ -27816,6 +28013,7 @@
                   <a:srgbClr val="8A6D1E"/>
                 </a:solidFill>
                 <a:latin typeface="Amiri" pitchFamily="2" charset="-78"/>
+                <a:ea typeface="Amiri" pitchFamily="2" charset="-78"/>
                 <a:cs typeface="Amiri" pitchFamily="2" charset="-78"/>
               </a:rPr>
               <a:t>قَيِّمْ عَمَلَكَ</a:t>
@@ -29060,6 +29258,7 @@
                   <a:srgbClr val="FFFFFF"/>
                 </a:solidFill>
                 <a:latin typeface="Amiri" pitchFamily="2" charset="-78"/>
+                <a:ea typeface="Amiri" pitchFamily="2" charset="-78"/>
                 <a:cs typeface="Amiri" pitchFamily="2" charset="-78"/>
               </a:rPr>
               <a:t>أَحْسَنْتُمْ! إِلَى اللِّقَاءِ</a:t>
@@ -29212,6 +29411,7 @@
                   <a:srgbClr val="D4AF37"/>
                 </a:solidFill>
                 <a:latin typeface="Amiri" pitchFamily="2" charset="-78"/>
+                <a:ea typeface="Amiri" pitchFamily="2" charset="-78"/>
                 <a:cs typeface="Amiri" pitchFamily="2" charset="-78"/>
               </a:rPr>
               <a:t>وَرْشَةُ الكِتَابَةِ</a:t>
@@ -29345,6 +29545,7 @@
                   <a:srgbClr val="D4AF37"/>
                 </a:solidFill>
                 <a:latin typeface="Amiri" pitchFamily="2" charset="-78"/>
+                <a:ea typeface="Amiri" pitchFamily="2" charset="-78"/>
                 <a:cs typeface="Amiri" pitchFamily="2" charset="-78"/>
               </a:rPr>
               <a:t>م</a:t>
@@ -29665,6 +29866,7 @@
                   <a:srgbClr val="8A6D1E"/>
                 </a:solidFill>
                 <a:latin typeface="Amiri" pitchFamily="2" charset="-78"/>
+                <a:ea typeface="Amiri" pitchFamily="2" charset="-78"/>
                 <a:cs typeface="Amiri" pitchFamily="2" charset="-78"/>
               </a:rPr>
               <a:t>خَرِيطَةُ الوَرْشَةِ</a:t>
@@ -29979,6 +30181,7 @@
                   <a:srgbClr val="1B3B6F"/>
                 </a:solidFill>
                 <a:latin typeface="Amiri" pitchFamily="2" charset="-78"/>
+                <a:ea typeface="Amiri" pitchFamily="2" charset="-78"/>
                 <a:cs typeface="Amiri" pitchFamily="2" charset="-78"/>
               </a:rPr>
               <a:t>كَيْفَ</a:t>
@@ -30255,6 +30458,7 @@
                   <a:srgbClr val="1E6B52"/>
                 </a:solidFill>
                 <a:latin typeface="Amiri" pitchFamily="2" charset="-78"/>
+                <a:ea typeface="Amiri" pitchFamily="2" charset="-78"/>
                 <a:cs typeface="Amiri" pitchFamily="2" charset="-78"/>
               </a:rPr>
               <a:t>تَمْثِيلُ الدَّوْرِ</a:t>
@@ -30531,6 +30735,7 @@
                   <a:srgbClr val="8A6D1E"/>
                 </a:solidFill>
                 <a:latin typeface="Amiri" pitchFamily="2" charset="-78"/>
+                <a:ea typeface="Amiri" pitchFamily="2" charset="-78"/>
                 <a:cs typeface="Amiri" pitchFamily="2" charset="-78"/>
               </a:rPr>
               <a:t>النَّمُوذَجُ</a:t>
@@ -30807,6 +31012,7 @@
                   <a:srgbClr val="1E6B52"/>
                 </a:solidFill>
                 <a:latin typeface="Amiri" pitchFamily="2" charset="-78"/>
+                <a:ea typeface="Amiri" pitchFamily="2" charset="-78"/>
                 <a:cs typeface="Amiri" pitchFamily="2" charset="-78"/>
               </a:rPr>
               <a:t>المُحَادَثَةُ</a:t>
@@ -31083,6 +31289,7 @@
                   <a:srgbClr val="8A6D1E"/>
                 </a:solidFill>
                 <a:latin typeface="Amiri" pitchFamily="2" charset="-78"/>
+                <a:ea typeface="Amiri" pitchFamily="2" charset="-78"/>
                 <a:cs typeface="Amiri" pitchFamily="2" charset="-78"/>
               </a:rPr>
               <a:t>قَيِّمْ</a:t>
@@ -31326,6 +31533,7 @@
                   <a:srgbClr val="D4AF37"/>
                 </a:solidFill>
                 <a:latin typeface="Amiri" pitchFamily="2" charset="-78"/>
+                <a:ea typeface="Amiri" pitchFamily="2" charset="-78"/>
                 <a:cs typeface="Amiri" pitchFamily="2" charset="-78"/>
               </a:rPr>
               <a:t>م</a:t>
@@ -31646,6 +31854,7 @@
                   <a:srgbClr val="8A6D1E"/>
                 </a:solidFill>
                 <a:latin typeface="Amiri" pitchFamily="2" charset="-78"/>
+                <a:ea typeface="Amiri" pitchFamily="2" charset="-78"/>
                 <a:cs typeface="Amiri" pitchFamily="2" charset="-78"/>
               </a:rPr>
               <a:t>امْتِحَانُ التَّحَدُّثِ</a:t>
@@ -32270,6 +32479,7 @@
                   <a:srgbClr val="1B3B6F"/>
                 </a:solidFill>
                 <a:latin typeface="Amiri" pitchFamily="2" charset="-78"/>
+                <a:ea typeface="Amiri" pitchFamily="2" charset="-78"/>
                 <a:cs typeface="Amiri" pitchFamily="2" charset="-78"/>
               </a:rPr>
               <a:t>عَفْوًا، هَلْ يُمْكِنُ أَنْ تُعِيدَ السُّؤَالَ؟</a:t>
@@ -32369,6 +32579,7 @@
                   <a:srgbClr val="1B3B6F"/>
                 </a:solidFill>
                 <a:latin typeface="Amiri" pitchFamily="2" charset="-78"/>
+                <a:ea typeface="Amiri" pitchFamily="2" charset="-78"/>
                 <a:cs typeface="Amiri" pitchFamily="2" charset="-78"/>
               </a:rPr>
               <a:t>لَحْظَةً، دَعْنِي أُفَكِّرُ …</a:t>
@@ -32468,6 +32679,7 @@
                   <a:srgbClr val="1B3B6F"/>
                 </a:solidFill>
                 <a:latin typeface="Amiri" pitchFamily="2" charset="-78"/>
+                <a:ea typeface="Amiri" pitchFamily="2" charset="-78"/>
                 <a:cs typeface="Amiri" pitchFamily="2" charset="-78"/>
               </a:rPr>
               <a:t>أَقْصِدُ …</a:t>
@@ -32639,6 +32851,7 @@
                   <a:srgbClr val="D4AF37"/>
                 </a:solidFill>
                 <a:latin typeface="Amiri" pitchFamily="2" charset="-78"/>
+                <a:ea typeface="Amiri" pitchFamily="2" charset="-78"/>
                 <a:cs typeface="Amiri" pitchFamily="2" charset="-78"/>
               </a:rPr>
               <a:t>م</a:t>
@@ -32959,6 +33172,7 @@
                   <a:srgbClr val="8A6D1E"/>
                 </a:solidFill>
                 <a:latin typeface="Amiri" pitchFamily="2" charset="-78"/>
+                <a:ea typeface="Amiri" pitchFamily="2" charset="-78"/>
                 <a:cs typeface="Amiri" pitchFamily="2" charset="-78"/>
               </a:rPr>
               <a:t>مَشَاكِلُ البِيئَةِ</a:t>
@@ -33262,6 +33476,7 @@
                   <a:srgbClr val="1B3B6F"/>
                 </a:solidFill>
                 <a:latin typeface="Amiri" pitchFamily="2" charset="-78"/>
+                <a:ea typeface="Amiri" pitchFamily="2" charset="-78"/>
                 <a:cs typeface="Amiri" pitchFamily="2" charset="-78"/>
               </a:rPr>
               <a:t>البِيئَةُ</a:t>
@@ -33419,6 +33634,7 @@
                   <a:srgbClr val="1B3B6F"/>
                 </a:solidFill>
                 <a:latin typeface="Amiri" pitchFamily="2" charset="-78"/>
+                <a:ea typeface="Amiri" pitchFamily="2" charset="-78"/>
                 <a:cs typeface="Amiri" pitchFamily="2" charset="-78"/>
               </a:rPr>
               <a:t>بِيئِيَّةٌ</a:t>
@@ -33522,6 +33738,7 @@
                   <a:srgbClr val="1B3B6F"/>
                 </a:solidFill>
                 <a:latin typeface="Amiri" pitchFamily="2" charset="-78"/>
+                <a:ea typeface="Amiri" pitchFamily="2" charset="-78"/>
                 <a:cs typeface="Amiri" pitchFamily="2" charset="-78"/>
               </a:rPr>
               <a:t>بِيئِيٌّ</a:t>
@@ -33787,6 +34004,7 @@
                   <a:srgbClr val="1B3B6F"/>
                 </a:solidFill>
                 <a:latin typeface="Amiri" pitchFamily="2" charset="-78"/>
+                <a:ea typeface="Amiri" pitchFamily="2" charset="-78"/>
                 <a:cs typeface="Amiri" pitchFamily="2" charset="-78"/>
               </a:rPr>
               <a:t>تَلَوُّثٌ</a:t>
@@ -33944,6 +34162,7 @@
                   <a:srgbClr val="1B3B6F"/>
                 </a:solidFill>
                 <a:latin typeface="Amiri" pitchFamily="2" charset="-78"/>
+                <a:ea typeface="Amiri" pitchFamily="2" charset="-78"/>
                 <a:cs typeface="Amiri" pitchFamily="2" charset="-78"/>
               </a:rPr>
               <a:t>مُلَوَّثٌ · مُلَوَّثَةٌ</a:t>
@@ -34047,6 +34266,7 @@
                   <a:srgbClr val="1B3B6F"/>
                 </a:solidFill>
                 <a:latin typeface="Amiri" pitchFamily="2" charset="-78"/>
+                <a:ea typeface="Amiri" pitchFamily="2" charset="-78"/>
                 <a:cs typeface="Amiri" pitchFamily="2" charset="-78"/>
               </a:rPr>
               <a:t>تَلَوُّثُ الهَوَاءِ</a:t>
@@ -34312,6 +34532,7 @@
                   <a:srgbClr val="1B3B6F"/>
                 </a:solidFill>
                 <a:latin typeface="Amiri" pitchFamily="2" charset="-78"/>
+                <a:ea typeface="Amiri" pitchFamily="2" charset="-78"/>
                 <a:cs typeface="Amiri" pitchFamily="2" charset="-78"/>
               </a:rPr>
               <a:t>يُلَوِّثُ</a:t>
@@ -34469,6 +34690,7 @@
                   <a:srgbClr val="1B3B6F"/>
                 </a:solidFill>
                 <a:latin typeface="Amiri" pitchFamily="2" charset="-78"/>
+                <a:ea typeface="Amiri" pitchFamily="2" charset="-78"/>
                 <a:cs typeface="Amiri" pitchFamily="2" charset="-78"/>
               </a:rPr>
               <a:t>يُلَوَّثُ · تُلَوَّثُ</a:t>
@@ -34572,6 +34794,7 @@
                   <a:srgbClr val="1B3B6F"/>
                 </a:solidFill>
                 <a:latin typeface="Amiri" pitchFamily="2" charset="-78"/>
+                <a:ea typeface="Amiri" pitchFamily="2" charset="-78"/>
                 <a:cs typeface="Amiri" pitchFamily="2" charset="-78"/>
               </a:rPr>
               <a:t>تُلَوِّثُ</a:t>
@@ -34837,6 +35060,7 @@
                   <a:srgbClr val="1B3B6F"/>
                 </a:solidFill>
                 <a:latin typeface="Amiri" pitchFamily="2" charset="-78"/>
+                <a:ea typeface="Amiri" pitchFamily="2" charset="-78"/>
                 <a:cs typeface="Amiri" pitchFamily="2" charset="-78"/>
               </a:rPr>
               <a:t>نُفَايَاتٌ</a:t>
@@ -34994,6 +35218,7 @@
                   <a:srgbClr val="1B3B6F"/>
                 </a:solidFill>
                 <a:latin typeface="Amiri" pitchFamily="2" charset="-78"/>
+                <a:ea typeface="Amiri" pitchFamily="2" charset="-78"/>
                 <a:cs typeface="Amiri" pitchFamily="2" charset="-78"/>
               </a:rPr>
               <a:t>سَلَّةُ مُهْمَلَاتٍ</a:t>
@@ -35097,6 +35322,7 @@
                   <a:srgbClr val="1B3B6F"/>
                 </a:solidFill>
                 <a:latin typeface="Amiri" pitchFamily="2" charset="-78"/>
+                <a:ea typeface="Amiri" pitchFamily="2" charset="-78"/>
                 <a:cs typeface="Amiri" pitchFamily="2" charset="-78"/>
               </a:rPr>
               <a:t>نُفَايَاتٌ بْلَاسْتِيكِيَّةٌ</a:t>
@@ -35362,6 +35588,7 @@
                   <a:srgbClr val="1B3B6F"/>
                 </a:solidFill>
                 <a:latin typeface="Amiri" pitchFamily="2" charset="-78"/>
+                <a:ea typeface="Amiri" pitchFamily="2" charset="-78"/>
                 <a:cs typeface="Amiri" pitchFamily="2" charset="-78"/>
               </a:rPr>
               <a:t>دُخَانٌ</a:t>
@@ -35519,6 +35746,7 @@
                   <a:srgbClr val="1B3B6F"/>
                 </a:solidFill>
                 <a:latin typeface="Amiri" pitchFamily="2" charset="-78"/>
+                <a:ea typeface="Amiri" pitchFamily="2" charset="-78"/>
                 <a:cs typeface="Amiri" pitchFamily="2" charset="-78"/>
               </a:rPr>
               <a:t>مَصَانِعُ</a:t>
@@ -35622,6 +35850,7 @@
                   <a:srgbClr val="1B3B6F"/>
                 </a:solidFill>
                 <a:latin typeface="Amiri" pitchFamily="2" charset="-78"/>
+                <a:ea typeface="Amiri" pitchFamily="2" charset="-78"/>
                 <a:cs typeface="Amiri" pitchFamily="2" charset="-78"/>
               </a:rPr>
               <a:t>دُخَانُ السَّيَّارَاتِ</a:t>
@@ -35887,6 +36116,7 @@
                   <a:srgbClr val="1B3B6F"/>
                 </a:solidFill>
                 <a:latin typeface="Amiri" pitchFamily="2" charset="-78"/>
+                <a:ea typeface="Amiri" pitchFamily="2" charset="-78"/>
                 <a:cs typeface="Amiri" pitchFamily="2" charset="-78"/>
               </a:rPr>
               <a:t>زَحْمَةُ المُرُورِ</a:t>
@@ -36044,6 +36274,7 @@
                   <a:srgbClr val="1B3B6F"/>
                 </a:solidFill>
                 <a:latin typeface="Amiri" pitchFamily="2" charset="-78"/>
+                <a:ea typeface="Amiri" pitchFamily="2" charset="-78"/>
                 <a:cs typeface="Amiri" pitchFamily="2" charset="-78"/>
               </a:rPr>
               <a:t>مُزْدَحِمٌ</a:t>
@@ -36147,6 +36378,7 @@
                   <a:srgbClr val="1B3B6F"/>
                 </a:solidFill>
                 <a:latin typeface="Amiri" pitchFamily="2" charset="-78"/>
+                <a:ea typeface="Amiri" pitchFamily="2" charset="-78"/>
                 <a:cs typeface="Amiri" pitchFamily="2" charset="-78"/>
               </a:rPr>
               <a:t>مُزْدَحِمَةٌ</a:t>
@@ -36280,6 +36512,7 @@
                   <a:srgbClr val="D4AF37"/>
                 </a:solidFill>
                 <a:latin typeface="Amiri" pitchFamily="2" charset="-78"/>
+                <a:ea typeface="Amiri" pitchFamily="2" charset="-78"/>
                 <a:cs typeface="Amiri" pitchFamily="2" charset="-78"/>
               </a:rPr>
               <a:t>م</a:t>
@@ -36600,6 +36833,7 @@
                   <a:srgbClr val="8A6D1E"/>
                 </a:solidFill>
                 <a:latin typeface="Amiri" pitchFamily="2" charset="-78"/>
+                <a:ea typeface="Amiri" pitchFamily="2" charset="-78"/>
                 <a:cs typeface="Amiri" pitchFamily="2" charset="-78"/>
               </a:rPr>
               <a:t>الأَسْبَابُ وَالنَّتَائِجُ</a:t>
@@ -36903,6 +37137,7 @@
                   <a:srgbClr val="1B3B6F"/>
                 </a:solidFill>
                 <a:latin typeface="Amiri" pitchFamily="2" charset="-78"/>
+                <a:ea typeface="Amiri" pitchFamily="2" charset="-78"/>
                 <a:cs typeface="Amiri" pitchFamily="2" charset="-78"/>
               </a:rPr>
               <a:t>قَطْعُ الأَشْجَارِ</a:t>
@@ -37060,6 +37295,7 @@
                   <a:srgbClr val="1B3B6F"/>
                 </a:solidFill>
                 <a:latin typeface="Amiri" pitchFamily="2" charset="-78"/>
+                <a:ea typeface="Amiri" pitchFamily="2" charset="-78"/>
                 <a:cs typeface="Amiri" pitchFamily="2" charset="-78"/>
               </a:rPr>
               <a:t>تُقْطَعُ الغَابَاتُ</a:t>
@@ -37325,6 +37561,7 @@
                   <a:srgbClr val="1B3B6F"/>
                 </a:solidFill>
                 <a:latin typeface="Amiri" pitchFamily="2" charset="-78"/>
+                <a:ea typeface="Amiri" pitchFamily="2" charset="-78"/>
                 <a:cs typeface="Amiri" pitchFamily="2" charset="-78"/>
               </a:rPr>
               <a:t>الاحْتِبَاسُ الحَرَارِيُّ</a:t>
@@ -37482,6 +37719,7 @@
                   <a:srgbClr val="1B3B6F"/>
                 </a:solidFill>
                 <a:latin typeface="Amiri" pitchFamily="2" charset="-78"/>
+                <a:ea typeface="Amiri" pitchFamily="2" charset="-78"/>
                 <a:cs typeface="Amiri" pitchFamily="2" charset="-78"/>
               </a:rPr>
               <a:t>تَغَيُّرُ المُنَاخِ</a:t>
@@ -37747,6 +37985,7 @@
                   <a:srgbClr val="1B3B6F"/>
                 </a:solidFill>
                 <a:latin typeface="Amiri" pitchFamily="2" charset="-78"/>
+                <a:ea typeface="Amiri" pitchFamily="2" charset="-78"/>
                 <a:cs typeface="Amiri" pitchFamily="2" charset="-78"/>
               </a:rPr>
               <a:t>بِسَبَبِ …</a:t>
@@ -37904,6 +38143,7 @@
                   <a:srgbClr val="1B3B6F"/>
                 </a:solidFill>
                 <a:latin typeface="Amiri" pitchFamily="2" charset="-78"/>
+                <a:ea typeface="Amiri" pitchFamily="2" charset="-78"/>
                 <a:cs typeface="Amiri" pitchFamily="2" charset="-78"/>
               </a:rPr>
               <a:t>أَسْبَابٌ</a:t>
@@ -38007,6 +38247,7 @@
                   <a:srgbClr val="1B3B6F"/>
                 </a:solidFill>
                 <a:latin typeface="Amiri" pitchFamily="2" charset="-78"/>
+                <a:ea typeface="Amiri" pitchFamily="2" charset="-78"/>
                 <a:cs typeface="Amiri" pitchFamily="2" charset="-78"/>
               </a:rPr>
               <a:t>السَّبَبُ</a:t>
@@ -38272,6 +38513,7 @@
                   <a:srgbClr val="1B3B6F"/>
                 </a:solidFill>
                 <a:latin typeface="Amiri" pitchFamily="2" charset="-78"/>
+                <a:ea typeface="Amiri" pitchFamily="2" charset="-78"/>
                 <a:cs typeface="Amiri" pitchFamily="2" charset="-78"/>
               </a:rPr>
               <a:t>يُؤَدِّي إِلَى …</a:t>
@@ -38429,6 +38671,7 @@
                   <a:srgbClr val="1B3B6F"/>
                 </a:solidFill>
                 <a:latin typeface="Amiri" pitchFamily="2" charset="-78"/>
+                <a:ea typeface="Amiri" pitchFamily="2" charset="-78"/>
                 <a:cs typeface="Amiri" pitchFamily="2" charset="-78"/>
               </a:rPr>
               <a:t>مِمَّا يُسَبِّبُ</a:t>
@@ -38532,6 +38775,7 @@
                   <a:srgbClr val="1B3B6F"/>
                 </a:solidFill>
                 <a:latin typeface="Amiri" pitchFamily="2" charset="-78"/>
+                <a:ea typeface="Amiri" pitchFamily="2" charset="-78"/>
                 <a:cs typeface="Amiri" pitchFamily="2" charset="-78"/>
               </a:rPr>
               <a:t>تُؤَدِّي إِلَى</a:t>
@@ -38797,6 +39041,7 @@
                   <a:srgbClr val="1B3B6F"/>
                 </a:solidFill>
                 <a:latin typeface="Amiri" pitchFamily="2" charset="-78"/>
+                <a:ea typeface="Amiri" pitchFamily="2" charset="-78"/>
                 <a:cs typeface="Amiri" pitchFamily="2" charset="-78"/>
               </a:rPr>
               <a:t>خَطِيرٌ · ضَارٌّ</a:t>
@@ -38954,6 +39199,7 @@
                   <a:srgbClr val="1B3B6F"/>
                 </a:solidFill>
                 <a:latin typeface="Amiri" pitchFamily="2" charset="-78"/>
+                <a:ea typeface="Amiri" pitchFamily="2" charset="-78"/>
                 <a:cs typeface="Amiri" pitchFamily="2" charset="-78"/>
               </a:rPr>
               <a:t>يَضُرُّ بِالبِيئَةِ</a:t>
@@ -39057,6 +39303,7 @@
                   <a:srgbClr val="1B3B6F"/>
                 </a:solidFill>
                 <a:latin typeface="Amiri" pitchFamily="2" charset="-78"/>
+                <a:ea typeface="Amiri" pitchFamily="2" charset="-78"/>
                 <a:cs typeface="Amiri" pitchFamily="2" charset="-78"/>
               </a:rPr>
               <a:t>خَطِيرَةٌ · ضَارَّةٌ</a:t>
@@ -39322,6 +39569,7 @@
                   <a:srgbClr val="1B3B6F"/>
                 </a:solidFill>
                 <a:latin typeface="Amiri" pitchFamily="2" charset="-78"/>
+                <a:ea typeface="Amiri" pitchFamily="2" charset="-78"/>
                 <a:cs typeface="Amiri" pitchFamily="2" charset="-78"/>
               </a:rPr>
               <a:t>مُشْكِلَةٌ</a:t>
@@ -39479,6 +39727,7 @@
                   <a:srgbClr val="1B3B6F"/>
                 </a:solidFill>
                 <a:latin typeface="Amiri" pitchFamily="2" charset="-78"/>
+                <a:ea typeface="Amiri" pitchFamily="2" charset="-78"/>
                 <a:cs typeface="Amiri" pitchFamily="2" charset="-78"/>
               </a:rPr>
               <a:t>مُشْكِلَةٌ كَبِيرَةٌ</a:t>
@@ -39582,6 +39831,7 @@
                   <a:srgbClr val="1B3B6F"/>
                 </a:solidFill>
                 <a:latin typeface="Amiri" pitchFamily="2" charset="-78"/>
+                <a:ea typeface="Amiri" pitchFamily="2" charset="-78"/>
                 <a:cs typeface="Amiri" pitchFamily="2" charset="-78"/>
               </a:rPr>
               <a:t>مَشَاكِلُ · مُشْكِلَاتٌ</a:t>
@@ -39715,6 +39965,7 @@
                   <a:srgbClr val="D4AF37"/>
                 </a:solidFill>
                 <a:latin typeface="Amiri" pitchFamily="2" charset="-78"/>
+                <a:ea typeface="Amiri" pitchFamily="2" charset="-78"/>
                 <a:cs typeface="Amiri" pitchFamily="2" charset="-78"/>
               </a:rPr>
               <a:t>م</a:t>
@@ -40035,6 +40286,7 @@
                   <a:srgbClr val="8A6D1E"/>
                 </a:solidFill>
                 <a:latin typeface="Amiri" pitchFamily="2" charset="-78"/>
+                <a:ea typeface="Amiri" pitchFamily="2" charset="-78"/>
                 <a:cs typeface="Amiri" pitchFamily="2" charset="-78"/>
               </a:rPr>
               <a:t>فِي الغُرَفِ</a:t>
@@ -41211,6 +41463,7 @@
                   <a:srgbClr val="1B3B6F"/>
                 </a:solidFill>
                 <a:latin typeface="Amiri" pitchFamily="2" charset="-78"/>
+                <a:ea typeface="Amiri" pitchFamily="2" charset="-78"/>
                 <a:cs typeface="Amiri" pitchFamily="2" charset="-78"/>
               </a:rPr>
               <a:t>دَوْرُكَ!</a:t>
@@ -41287,6 +41540,7 @@
                   <a:srgbClr val="1B3B6F"/>
                 </a:solidFill>
                 <a:latin typeface="Amiri" pitchFamily="2" charset="-78"/>
+                <a:ea typeface="Amiri" pitchFamily="2" charset="-78"/>
                 <a:cs typeface="Amiri" pitchFamily="2" charset="-78"/>
               </a:rPr>
               <a:t>أَحْسَنْتَ! / أَحْسَنْتِ!</a:t>
@@ -41363,6 +41617,7 @@
                   <a:srgbClr val="1B3B6F"/>
                 </a:solidFill>
                 <a:latin typeface="Amiri" pitchFamily="2" charset="-78"/>
+                <a:ea typeface="Amiri" pitchFamily="2" charset="-78"/>
                 <a:cs typeface="Amiri" pitchFamily="2" charset="-78"/>
               </a:rPr>
               <a:t>تَكَلَّمْ أَكْثَرَ، مِنْ فَضْلِكَ</a:t>
@@ -41439,6 +41694,7 @@
                   <a:srgbClr val="1B3B6F"/>
                 </a:solidFill>
                 <a:latin typeface="Amiri" pitchFamily="2" charset="-78"/>
+                <a:ea typeface="Amiri" pitchFamily="2" charset="-78"/>
                 <a:cs typeface="Amiri" pitchFamily="2" charset="-78"/>
               </a:rPr>
               <a:t>لِمَاذَا؟</a:t>
@@ -41610,6 +41866,7 @@
                   <a:srgbClr val="D4AF37"/>
                 </a:solidFill>
                 <a:latin typeface="Amiri" pitchFamily="2" charset="-78"/>
+                <a:ea typeface="Amiri" pitchFamily="2" charset="-78"/>
                 <a:cs typeface="Amiri" pitchFamily="2" charset="-78"/>
               </a:rPr>
               <a:t>م</a:t>
@@ -41930,6 +42187,7 @@
                   <a:srgbClr val="8A6D1E"/>
                 </a:solidFill>
                 <a:latin typeface="Amiri" pitchFamily="2" charset="-78"/>
+                <a:ea typeface="Amiri" pitchFamily="2" charset="-78"/>
                 <a:cs typeface="Amiri" pitchFamily="2" charset="-78"/>
               </a:rPr>
               <a:t>اسْتِطْلَاعٌ عَنِ البِيئَةِ</a:t>
@@ -42210,6 +42468,7 @@
                   <a:srgbClr val="1B3B6F"/>
                 </a:solidFill>
                 <a:latin typeface="Amiri" pitchFamily="2" charset="-78"/>
+                <a:ea typeface="Amiri" pitchFamily="2" charset="-78"/>
                 <a:cs typeface="Amiri" pitchFamily="2" charset="-78"/>
               </a:rPr>
               <a:t>أَكْبَرُ مُشْكِلَةٍ هِيَ …</a:t>
@@ -42286,6 +42545,7 @@
                   <a:srgbClr val="1B3B6F"/>
                 </a:solidFill>
                 <a:latin typeface="Amiri" pitchFamily="2" charset="-78"/>
+                <a:ea typeface="Amiri" pitchFamily="2" charset="-78"/>
                 <a:cs typeface="Amiri" pitchFamily="2" charset="-78"/>
               </a:rPr>
               <a:t>مَا أَكْبَرُ مُشْكِلَةٍ فِي مَدِينَتِكَ؟</a:t>
@@ -42454,6 +42714,7 @@
                   <a:srgbClr val="1B3B6F"/>
                 </a:solidFill>
                 <a:latin typeface="Amiri" pitchFamily="2" charset="-78"/>
+                <a:ea typeface="Amiri" pitchFamily="2" charset="-78"/>
                 <a:cs typeface="Amiri" pitchFamily="2" charset="-78"/>
               </a:rPr>
               <a:t>لِأَنَّ …</a:t>
@@ -42530,6 +42791,7 @@
                   <a:srgbClr val="1B3B6F"/>
                 </a:solidFill>
                 <a:latin typeface="Amiri" pitchFamily="2" charset="-78"/>
+                <a:ea typeface="Amiri" pitchFamily="2" charset="-78"/>
                 <a:cs typeface="Amiri" pitchFamily="2" charset="-78"/>
               </a:rPr>
               <a:t>لِمَاذَا هِيَ مُشْكِلَةٌ؟</a:t>
@@ -42698,6 +42960,7 @@
                   <a:srgbClr val="1B3B6F"/>
                 </a:solidFill>
                 <a:latin typeface="Amiri" pitchFamily="2" charset="-78"/>
+                <a:ea typeface="Amiri" pitchFamily="2" charset="-78"/>
                 <a:cs typeface="Amiri" pitchFamily="2" charset="-78"/>
               </a:rPr>
               <a:t>فِي المَدْرَسَةِ … كَثِيرَةٌ</a:t>
@@ -42774,6 +43037,7 @@
                   <a:srgbClr val="1B3B6F"/>
                 </a:solidFill>
                 <a:latin typeface="Amiri" pitchFamily="2" charset="-78"/>
+                <a:ea typeface="Amiri" pitchFamily="2" charset="-78"/>
                 <a:cs typeface="Amiri" pitchFamily="2" charset="-78"/>
               </a:rPr>
               <a:t>وَفِي المَدْرَسَةِ؟</a:t>
@@ -42942,6 +43206,7 @@
                   <a:srgbClr val="1B3B6F"/>
                 </a:solidFill>
                 <a:latin typeface="Amiri" pitchFamily="2" charset="-78"/>
+                <a:ea typeface="Amiri" pitchFamily="2" charset="-78"/>
                 <a:cs typeface="Amiri" pitchFamily="2" charset="-78"/>
               </a:rPr>
               <a:t>مَنْ …؟</a:t>
@@ -43018,6 +43283,7 @@
                   <a:srgbClr val="1B3B6F"/>
                 </a:solidFill>
                 <a:latin typeface="Amiri" pitchFamily="2" charset="-78"/>
+                <a:ea typeface="Amiri" pitchFamily="2" charset="-78"/>
                 <a:cs typeface="Amiri" pitchFamily="2" charset="-78"/>
               </a:rPr>
               <a:t>نُرِيدُ أَنْ نَكْتُبَ تَقْرِيرًا.</a:t>
@@ -43186,6 +43452,7 @@
                   <a:srgbClr val="1B3B6F"/>
                 </a:solidFill>
                 <a:latin typeface="Amiri" pitchFamily="2" charset="-78"/>
+                <a:ea typeface="Amiri" pitchFamily="2" charset="-78"/>
                 <a:cs typeface="Amiri" pitchFamily="2" charset="-78"/>
               </a:rPr>
               <a:t>آتِي مَشْيًا / بِالسَّيَّارَةِ، لِأَنَّ …</a:t>
@@ -43262,6 +43529,7 @@
                   <a:srgbClr val="1B3B6F"/>
                 </a:solidFill>
                 <a:latin typeface="Amiri" pitchFamily="2" charset="-78"/>
+                <a:ea typeface="Amiri" pitchFamily="2" charset="-78"/>
                 <a:cs typeface="Amiri" pitchFamily="2" charset="-78"/>
               </a:rPr>
               <a:t>كَيْفَ تَأْتِي إِلَى المَدْرَسَةِ؟</a:t>
@@ -43536,6 +43804,7 @@
                   <a:srgbClr val="D4AF37"/>
                 </a:solidFill>
                 <a:latin typeface="Amiri" pitchFamily="2" charset="-78"/>
+                <a:ea typeface="Amiri" pitchFamily="2" charset="-78"/>
                 <a:cs typeface="Amiri" pitchFamily="2" charset="-78"/>
               </a:rPr>
               <a:t>م</a:t>
@@ -43856,6 +44125,7 @@
                   <a:srgbClr val="8A6D1E"/>
                 </a:solidFill>
                 <a:latin typeface="Amiri" pitchFamily="2" charset="-78"/>
+                <a:ea typeface="Amiri" pitchFamily="2" charset="-78"/>
                 <a:cs typeface="Amiri" pitchFamily="2" charset="-78"/>
               </a:rPr>
               <a:t>شَاطِئٌ مُلَوَّثٌ</a:t>
@@ -44136,6 +44406,7 @@
                   <a:srgbClr val="1B3B6F"/>
                 </a:solidFill>
                 <a:latin typeface="Amiri" pitchFamily="2" charset="-78"/>
+                <a:ea typeface="Amiri" pitchFamily="2" charset="-78"/>
                 <a:cs typeface="Amiri" pitchFamily="2" charset="-78"/>
               </a:rPr>
               <a:t>أَنَا فِي … وَهُوَ …</a:t>
@@ -44212,6 +44483,7 @@
                   <a:srgbClr val="1B3B6F"/>
                 </a:solidFill>
                 <a:latin typeface="Amiri" pitchFamily="2" charset="-78"/>
+                <a:ea typeface="Amiri" pitchFamily="2" charset="-78"/>
                 <a:cs typeface="Amiri" pitchFamily="2" charset="-78"/>
               </a:rPr>
               <a:t>أَهْلًا، كَيْفَ أُسَاعِدُكَ؟</a:t>
@@ -44380,6 +44652,7 @@
                   <a:srgbClr val="1B3B6F"/>
                 </a:solidFill>
                 <a:latin typeface="Amiri" pitchFamily="2" charset="-78"/>
+                <a:ea typeface="Amiri" pitchFamily="2" charset="-78"/>
                 <a:cs typeface="Amiri" pitchFamily="2" charset="-78"/>
               </a:rPr>
               <a:t>أَرَى … وَ…</a:t>
@@ -44456,6 +44729,7 @@
                   <a:srgbClr val="1B3B6F"/>
                 </a:solidFill>
                 <a:latin typeface="Amiri" pitchFamily="2" charset="-78"/>
+                <a:ea typeface="Amiri" pitchFamily="2" charset="-78"/>
                 <a:cs typeface="Amiri" pitchFamily="2" charset="-78"/>
               </a:rPr>
               <a:t>مَاذَا تَرَى بِالضَّبْطِ؟</a:t>
@@ -44624,6 +44898,7 @@
                   <a:srgbClr val="1B3B6F"/>
                 </a:solidFill>
                 <a:latin typeface="Amiri" pitchFamily="2" charset="-78"/>
+                <a:ea typeface="Amiri" pitchFamily="2" charset="-78"/>
                 <a:cs typeface="Amiri" pitchFamily="2" charset="-78"/>
               </a:rPr>
               <a:t>مَتَى سَيُنَظَّفُ …؟</a:t>
@@ -44700,6 +44975,7 @@
                   <a:srgbClr val="1B3B6F"/>
                 </a:solidFill>
                 <a:latin typeface="Amiri" pitchFamily="2" charset="-78"/>
+                <a:ea typeface="Amiri" pitchFamily="2" charset="-78"/>
                 <a:cs typeface="Amiri" pitchFamily="2" charset="-78"/>
               </a:rPr>
               <a:t>هٰذَا غَرِيبٌ.</a:t>
@@ -44803,6 +45079,7 @@
                   <a:srgbClr val="1B3B6F"/>
                 </a:solidFill>
                 <a:latin typeface="Amiri" pitchFamily="2" charset="-78"/>
+                <a:ea typeface="Amiri" pitchFamily="2" charset="-78"/>
                 <a:cs typeface="Amiri" pitchFamily="2" charset="-78"/>
               </a:rPr>
               <a:t>بِسَبَبِ … مِمَّا يَضُرُّ …</a:t>
@@ -44879,6 +45156,7 @@
                   <a:srgbClr val="1B3B6F"/>
                 </a:solidFill>
                 <a:latin typeface="Amiri" pitchFamily="2" charset="-78"/>
+                <a:ea typeface="Amiri" pitchFamily="2" charset="-78"/>
                 <a:cs typeface="Amiri" pitchFamily="2" charset="-78"/>
               </a:rPr>
               <a:t>غَدًا إِنْ شَاءَ اللّٰهُ. مَا السَّبَبُ فِي رَأْيِكَ؟</a:t>
@@ -44982,6 +45260,7 @@
                   <a:srgbClr val="1B3B6F"/>
                 </a:solidFill>
                 <a:latin typeface="Amiri" pitchFamily="2" charset="-78"/>
+                <a:ea typeface="Amiri" pitchFamily="2" charset="-78"/>
                 <a:cs typeface="Amiri" pitchFamily="2" charset="-78"/>
               </a:rPr>
               <a:t>لَا، … / نَعَمْ، لٰكِنَّ …</a:t>
@@ -45058,6 +45337,7 @@
                   <a:srgbClr val="1B3B6F"/>
                 </a:solidFill>
                 <a:latin typeface="Amiri" pitchFamily="2" charset="-78"/>
+                <a:ea typeface="Amiri" pitchFamily="2" charset="-78"/>
                 <a:cs typeface="Amiri" pitchFamily="2" charset="-78"/>
               </a:rPr>
               <a:t>هَلْ تَرَى سَلَّاتِ مُهْمَلَاتٍ هُنَاكَ؟</a:t>
@@ -45232,13 +45512,9 @@
     <a:fontScheme name="Office">
       <a:majorFont>
         <a:latin typeface="Calibri Light" panose="020F0302020204030204"/>
-        <a:ea typeface=""/>
-        <a:cs typeface=""/>
-        <a:font script="Jpan" typeface="游ゴシック Light"/>
-        <a:font script="Hang" typeface="맑은 고딕"/>
-        <a:font script="Hans" typeface="等线 Light"/>
-        <a:font script="Hant" typeface="新細明體"/>
-        <a:font script="Arab" typeface="Times New Roman"/>
+        <a:ea typeface="Amiri" pitchFamily="2" charset="-78"/>
+        <a:cs typeface="Amiri" pitchFamily="2" charset="-78"/>
+        <a:font script="Arab" typeface="Amiri"/>
         <a:font script="Hebr" typeface="Times New Roman"/>
         <a:font script="Thai" typeface="Angsana New"/>
         <a:font script="Ethi" typeface="Nyala"/>
@@ -45284,13 +45560,9 @@
       </a:majorFont>
       <a:minorFont>
         <a:latin typeface="Calibri" panose="020F0502020204030204"/>
-        <a:ea typeface=""/>
-        <a:cs typeface=""/>
-        <a:font script="Jpan" typeface="游ゴシック"/>
-        <a:font script="Hang" typeface="맑은 고딕"/>
-        <a:font script="Hans" typeface="等线"/>
-        <a:font script="Hant" typeface="新細明體"/>
-        <a:font script="Arab" typeface="Arial"/>
+        <a:ea typeface="Amiri" pitchFamily="2" charset="-78"/>
+        <a:cs typeface="Amiri" pitchFamily="2" charset="-78"/>
+        <a:font script="Arab" typeface="Amiri"/>
         <a:font script="Hebr" typeface="Arial"/>
         <a:font script="Thai" typeface="Cordia New"/>
         <a:font script="Ethi" typeface="Nyala"/>
